--- a/GPP_ZombieAI_AdamovDaniel_2DAE10.pptx
+++ b/GPP_ZombieAI_AdamovDaniel_2DAE10.pptx
@@ -405,7 +405,7 @@
           <a:p>
             <a:fld id="{82085877-2B37-48E7-8B6D-4D4ED486130A}" type="datetimeFigureOut">
               <a:rPr lang="en-BE" smtClean="0"/>
-              <a:t>11/28/2023</a:t>
+              <a:t>05/31/2026</a:t>
             </a:fld>
             <a:endParaRPr lang="en-BE"/>
           </a:p>
@@ -605,7 +605,7 @@
           <a:p>
             <a:fld id="{82085877-2B37-48E7-8B6D-4D4ED486130A}" type="datetimeFigureOut">
               <a:rPr lang="en-BE" smtClean="0"/>
-              <a:t>11/28/2023</a:t>
+              <a:t>05/31/2026</a:t>
             </a:fld>
             <a:endParaRPr lang="en-BE"/>
           </a:p>
@@ -815,7 +815,7 @@
           <a:p>
             <a:fld id="{82085877-2B37-48E7-8B6D-4D4ED486130A}" type="datetimeFigureOut">
               <a:rPr lang="en-BE" smtClean="0"/>
-              <a:t>11/28/2023</a:t>
+              <a:t>05/31/2026</a:t>
             </a:fld>
             <a:endParaRPr lang="en-BE"/>
           </a:p>
@@ -1015,7 +1015,7 @@
           <a:p>
             <a:fld id="{82085877-2B37-48E7-8B6D-4D4ED486130A}" type="datetimeFigureOut">
               <a:rPr lang="en-BE" smtClean="0"/>
-              <a:t>11/28/2023</a:t>
+              <a:t>05/31/2026</a:t>
             </a:fld>
             <a:endParaRPr lang="en-BE"/>
           </a:p>
@@ -1291,7 +1291,7 @@
           <a:p>
             <a:fld id="{82085877-2B37-48E7-8B6D-4D4ED486130A}" type="datetimeFigureOut">
               <a:rPr lang="en-BE" smtClean="0"/>
-              <a:t>11/28/2023</a:t>
+              <a:t>05/31/2026</a:t>
             </a:fld>
             <a:endParaRPr lang="en-BE"/>
           </a:p>
@@ -1559,7 +1559,7 @@
           <a:p>
             <a:fld id="{82085877-2B37-48E7-8B6D-4D4ED486130A}" type="datetimeFigureOut">
               <a:rPr lang="en-BE" smtClean="0"/>
-              <a:t>11/28/2023</a:t>
+              <a:t>05/31/2026</a:t>
             </a:fld>
             <a:endParaRPr lang="en-BE"/>
           </a:p>
@@ -1974,7 +1974,7 @@
           <a:p>
             <a:fld id="{82085877-2B37-48E7-8B6D-4D4ED486130A}" type="datetimeFigureOut">
               <a:rPr lang="en-BE" smtClean="0"/>
-              <a:t>11/28/2023</a:t>
+              <a:t>05/31/2026</a:t>
             </a:fld>
             <a:endParaRPr lang="en-BE"/>
           </a:p>
@@ -2116,7 +2116,7 @@
           <a:p>
             <a:fld id="{82085877-2B37-48E7-8B6D-4D4ED486130A}" type="datetimeFigureOut">
               <a:rPr lang="en-BE" smtClean="0"/>
-              <a:t>11/28/2023</a:t>
+              <a:t>05/31/2026</a:t>
             </a:fld>
             <a:endParaRPr lang="en-BE"/>
           </a:p>
@@ -2229,7 +2229,7 @@
           <a:p>
             <a:fld id="{82085877-2B37-48E7-8B6D-4D4ED486130A}" type="datetimeFigureOut">
               <a:rPr lang="en-BE" smtClean="0"/>
-              <a:t>11/28/2023</a:t>
+              <a:t>05/31/2026</a:t>
             </a:fld>
             <a:endParaRPr lang="en-BE"/>
           </a:p>
@@ -2542,7 +2542,7 @@
           <a:p>
             <a:fld id="{82085877-2B37-48E7-8B6D-4D4ED486130A}" type="datetimeFigureOut">
               <a:rPr lang="en-BE" smtClean="0"/>
-              <a:t>11/28/2023</a:t>
+              <a:t>05/31/2026</a:t>
             </a:fld>
             <a:endParaRPr lang="en-BE"/>
           </a:p>
@@ -2831,7 +2831,7 @@
           <a:p>
             <a:fld id="{82085877-2B37-48E7-8B6D-4D4ED486130A}" type="datetimeFigureOut">
               <a:rPr lang="en-BE" smtClean="0"/>
-              <a:t>11/28/2023</a:t>
+              <a:t>05/31/2026</a:t>
             </a:fld>
             <a:endParaRPr lang="en-BE"/>
           </a:p>
@@ -3074,7 +3074,7 @@
           <a:p>
             <a:fld id="{82085877-2B37-48E7-8B6D-4D4ED486130A}" type="datetimeFigureOut">
               <a:rPr lang="en-BE" smtClean="0"/>
-              <a:t>11/28/2023</a:t>
+              <a:t>05/31/2026</a:t>
             </a:fld>
             <a:endParaRPr lang="en-BE"/>
           </a:p>
@@ -4116,6 +4116,32 @@
             </a:r>
           </a:p>
           <a:p>
+            <a:endParaRPr lang="en-US" i="1" dirty="0">
+              <a:solidFill>
+                <a:schemeClr val="bg1">
+                  <a:lumMod val="75000"/>
+                </a:schemeClr>
+              </a:solidFill>
+            </a:endParaRPr>
+          </a:p>
+          <a:p>
+            <a:pPr marL="0" indent="0">
+              <a:buNone/>
+            </a:pPr>
+            <a:r>
+              <a:rPr lang="en-US" sz="1600" b="1" dirty="0"/>
+              <a:t>I decided to first name the least-urgent task Exploration. After thinking deeper, I thought that Discover would be a better name since the survivor starts with 0 memory – it knows of 0 houses. </a:t>
+            </a:r>
+            <a:r>
+              <a:rPr lang="en-US" sz="1600" b="1"/>
+              <a:t>So, </a:t>
+            </a:r>
+            <a:r>
+              <a:rPr lang="en-US" sz="1600" b="1" dirty="0"/>
+              <a:t>it starts trying to DISCOVER houses which they can then explore.</a:t>
+            </a:r>
+          </a:p>
+          <a:p>
             <a:pPr marL="0" indent="0">
               <a:buNone/>
             </a:pPr>
@@ -4535,12 +4561,18 @@
 </file>
 
 <file path=customXml/item1.xml><?xml version="1.0" encoding="utf-8"?>
-<?mso-contentType ?>
-<FormTemplates xmlns="http://schemas.microsoft.com/sharepoint/v3/contenttype/forms">
-  <Display>DocumentLibraryForm</Display>
-  <Edit>DocumentLibraryForm</Edit>
-  <New>DocumentLibraryForm</New>
-</FormTemplates>
+<p:properties xmlns:p="http://schemas.microsoft.com/office/2006/metadata/properties" xmlns:xsi="http://www.w3.org/2001/XMLSchema-instance" xmlns:pc="http://schemas.microsoft.com/office/infopath/2007/PartnerControls">
+  <documentManagement>
+    <IconOverlay xmlns="http://schemas.microsoft.com/sharepoint/v4" xsi:nil="true"/>
+    <TaxCatchAll xmlns="128482ec-0431-40d5-ab26-89ea2a4f3ccd" xsi:nil="true"/>
+    <m99485b88215436a82099f8287cba0b0 xmlns="128482ec-0431-40d5-ab26-89ea2a4f3ccd">
+      <Terms xmlns="http://schemas.microsoft.com/office/infopath/2007/PartnerControls"/>
+    </m99485b88215436a82099f8287cba0b0>
+    <lcf76f155ced4ddcb4097134ff3c332f xmlns="60eb0cf4-ae2a-4762-800a-cb593b869ecb">
+      <Terms xmlns="http://schemas.microsoft.com/office/infopath/2007/PartnerControls"/>
+    </lcf76f155ced4ddcb4097134ff3c332f>
+  </documentManagement>
+</p:properties>
 </file>
 
 <file path=customXml/item2.xml><?xml version="1.0" encoding="utf-8"?>
@@ -4817,24 +4849,22 @@
 </file>
 
 <file path=customXml/item3.xml><?xml version="1.0" encoding="utf-8"?>
-<p:properties xmlns:p="http://schemas.microsoft.com/office/2006/metadata/properties" xmlns:xsi="http://www.w3.org/2001/XMLSchema-instance" xmlns:pc="http://schemas.microsoft.com/office/infopath/2007/PartnerControls">
-  <documentManagement>
-    <IconOverlay xmlns="http://schemas.microsoft.com/sharepoint/v4" xsi:nil="true"/>
-    <TaxCatchAll xmlns="128482ec-0431-40d5-ab26-89ea2a4f3ccd" xsi:nil="true"/>
-    <m99485b88215436a82099f8287cba0b0 xmlns="128482ec-0431-40d5-ab26-89ea2a4f3ccd">
-      <Terms xmlns="http://schemas.microsoft.com/office/infopath/2007/PartnerControls"/>
-    </m99485b88215436a82099f8287cba0b0>
-    <lcf76f155ced4ddcb4097134ff3c332f xmlns="60eb0cf4-ae2a-4762-800a-cb593b869ecb">
-      <Terms xmlns="http://schemas.microsoft.com/office/infopath/2007/PartnerControls"/>
-    </lcf76f155ced4ddcb4097134ff3c332f>
-  </documentManagement>
-</p:properties>
+<?mso-contentType ?>
+<FormTemplates xmlns="http://schemas.microsoft.com/sharepoint/v3/contenttype/forms">
+  <Display>DocumentLibraryForm</Display>
+  <Edit>DocumentLibraryForm</Edit>
+  <New>DocumentLibraryForm</New>
+</FormTemplates>
 </file>
 
 <file path=customXml/itemProps1.xml><?xml version="1.0" encoding="utf-8"?>
-<ds:datastoreItem xmlns:ds="http://schemas.openxmlformats.org/officeDocument/2006/customXml" ds:itemID="{AF8EC6D1-CB19-4400-AD0A-0C75CD884AEA}">
+<ds:datastoreItem xmlns:ds="http://schemas.openxmlformats.org/officeDocument/2006/customXml" ds:itemID="{B743389A-7EE0-4951-8919-E91DD69E3687}">
   <ds:schemaRefs>
-    <ds:schemaRef ds:uri="http://schemas.microsoft.com/sharepoint/v3/contenttype/forms"/>
+    <ds:schemaRef ds:uri="128482ec-0431-40d5-ab26-89ea2a4f3ccd"/>
+    <ds:schemaRef ds:uri="http://schemas.microsoft.com/office/2006/metadata/properties"/>
+    <ds:schemaRef ds:uri="http://schemas.microsoft.com/office/infopath/2007/PartnerControls"/>
+    <ds:schemaRef ds:uri="http://schemas.microsoft.com/sharepoint/v4"/>
+    <ds:schemaRef ds:uri="60eb0cf4-ae2a-4762-800a-cb593b869ecb"/>
   </ds:schemaRefs>
 </ds:datastoreItem>
 </file>
@@ -4861,13 +4891,9 @@
 </file>
 
 <file path=customXml/itemProps3.xml><?xml version="1.0" encoding="utf-8"?>
-<ds:datastoreItem xmlns:ds="http://schemas.openxmlformats.org/officeDocument/2006/customXml" ds:itemID="{B743389A-7EE0-4951-8919-E91DD69E3687}">
+<ds:datastoreItem xmlns:ds="http://schemas.openxmlformats.org/officeDocument/2006/customXml" ds:itemID="{AF8EC6D1-CB19-4400-AD0A-0C75CD884AEA}">
   <ds:schemaRefs>
-    <ds:schemaRef ds:uri="128482ec-0431-40d5-ab26-89ea2a4f3ccd"/>
-    <ds:schemaRef ds:uri="http://schemas.microsoft.com/office/2006/metadata/properties"/>
-    <ds:schemaRef ds:uri="http://schemas.microsoft.com/office/infopath/2007/PartnerControls"/>
-    <ds:schemaRef ds:uri="http://schemas.microsoft.com/sharepoint/v4"/>
-    <ds:schemaRef ds:uri="60eb0cf4-ae2a-4762-800a-cb593b869ecb"/>
+    <ds:schemaRef ds:uri="http://schemas.microsoft.com/sharepoint/v3/contenttype/forms"/>
   </ds:schemaRefs>
 </ds:datastoreItem>
 </file>
--- a/GPP_ZombieAI_AdamovDaniel_2DAE10.pptx
+++ b/GPP_ZombieAI_AdamovDaniel_2DAE10.pptx
@@ -4130,15 +4130,46 @@
             </a:pPr>
             <a:r>
               <a:rPr lang="en-US" sz="1600" b="1" dirty="0"/>
-              <a:t>I decided to first name the least-urgent task Exploration. After thinking deeper, I thought that Discover would be a better name since the survivor starts with 0 memory – it knows of 0 houses. </a:t>
-            </a:r>
-            <a:r>
-              <a:rPr lang="en-US" sz="1600" b="1"/>
-              <a:t>So, </a:t>
-            </a:r>
+              <a:t>I decided to first name the least-urgent task Exploration. After thinking deeper, I thought that Discover would be a better name since the survivor starts with 0 memory – it knows of 0 houses. So, it starts trying to DISCOVER houses which they can then explore.</a:t>
+            </a:r>
+          </a:p>
+          <a:p>
+            <a:pPr marL="0" indent="0">
+              <a:buNone/>
+            </a:pPr>
+            <a:endParaRPr lang="en-US" sz="1600" b="1" dirty="0"/>
+          </a:p>
+          <a:p>
+            <a:pPr marL="0" indent="0">
+              <a:buNone/>
+            </a:pPr>
             <a:r>
               <a:rPr lang="en-US" sz="1600" b="1" dirty="0"/>
-              <a:t>it starts trying to DISCOVER houses which they can then explore.</a:t>
+              <a:t>Perception – produces knowledge/memory of surroundings. When the Survivor doesn’t look at something, some data is still kept in the BB – </a:t>
+            </a:r>
+            <a:r>
+              <a:rPr lang="en-US" sz="1600" b="1" dirty="0" err="1"/>
+              <a:t>ThreatActor</a:t>
+            </a:r>
+            <a:r>
+              <a:rPr lang="en-US" sz="1600" b="1" dirty="0"/>
+              <a:t>, </a:t>
+            </a:r>
+            <a:r>
+              <a:rPr lang="en-US" sz="1600" b="1" dirty="0" err="1"/>
+              <a:t>TargetItem</a:t>
+            </a:r>
+            <a:r>
+              <a:rPr lang="en-US" sz="1600" b="1" dirty="0"/>
+              <a:t>, </a:t>
+            </a:r>
+            <a:r>
+              <a:rPr lang="en-US" sz="1600" b="1" dirty="0" err="1"/>
+              <a:t>KnownHouseTarget</a:t>
+            </a:r>
+            <a:r>
+              <a:rPr lang="en-US" sz="1600" b="1" dirty="0"/>
+              <a:t>. The BT then decides what do with this information.</a:t>
             </a:r>
           </a:p>
           <a:p>
@@ -4561,18 +4592,12 @@
 </file>
 
 <file path=customXml/item1.xml><?xml version="1.0" encoding="utf-8"?>
-<p:properties xmlns:p="http://schemas.microsoft.com/office/2006/metadata/properties" xmlns:xsi="http://www.w3.org/2001/XMLSchema-instance" xmlns:pc="http://schemas.microsoft.com/office/infopath/2007/PartnerControls">
-  <documentManagement>
-    <IconOverlay xmlns="http://schemas.microsoft.com/sharepoint/v4" xsi:nil="true"/>
-    <TaxCatchAll xmlns="128482ec-0431-40d5-ab26-89ea2a4f3ccd" xsi:nil="true"/>
-    <m99485b88215436a82099f8287cba0b0 xmlns="128482ec-0431-40d5-ab26-89ea2a4f3ccd">
-      <Terms xmlns="http://schemas.microsoft.com/office/infopath/2007/PartnerControls"/>
-    </m99485b88215436a82099f8287cba0b0>
-    <lcf76f155ced4ddcb4097134ff3c332f xmlns="60eb0cf4-ae2a-4762-800a-cb593b869ecb">
-      <Terms xmlns="http://schemas.microsoft.com/office/infopath/2007/PartnerControls"/>
-    </lcf76f155ced4ddcb4097134ff3c332f>
-  </documentManagement>
-</p:properties>
+<?mso-contentType ?>
+<FormTemplates xmlns="http://schemas.microsoft.com/sharepoint/v3/contenttype/forms">
+  <Display>DocumentLibraryForm</Display>
+  <Edit>DocumentLibraryForm</Edit>
+  <New>DocumentLibraryForm</New>
+</FormTemplates>
 </file>
 
 <file path=customXml/item2.xml><?xml version="1.0" encoding="utf-8"?>
@@ -4849,22 +4874,24 @@
 </file>
 
 <file path=customXml/item3.xml><?xml version="1.0" encoding="utf-8"?>
-<?mso-contentType ?>
-<FormTemplates xmlns="http://schemas.microsoft.com/sharepoint/v3/contenttype/forms">
-  <Display>DocumentLibraryForm</Display>
-  <Edit>DocumentLibraryForm</Edit>
-  <New>DocumentLibraryForm</New>
-</FormTemplates>
+<p:properties xmlns:p="http://schemas.microsoft.com/office/2006/metadata/properties" xmlns:xsi="http://www.w3.org/2001/XMLSchema-instance" xmlns:pc="http://schemas.microsoft.com/office/infopath/2007/PartnerControls">
+  <documentManagement>
+    <IconOverlay xmlns="http://schemas.microsoft.com/sharepoint/v4" xsi:nil="true"/>
+    <TaxCatchAll xmlns="128482ec-0431-40d5-ab26-89ea2a4f3ccd" xsi:nil="true"/>
+    <m99485b88215436a82099f8287cba0b0 xmlns="128482ec-0431-40d5-ab26-89ea2a4f3ccd">
+      <Terms xmlns="http://schemas.microsoft.com/office/infopath/2007/PartnerControls"/>
+    </m99485b88215436a82099f8287cba0b0>
+    <lcf76f155ced4ddcb4097134ff3c332f xmlns="60eb0cf4-ae2a-4762-800a-cb593b869ecb">
+      <Terms xmlns="http://schemas.microsoft.com/office/infopath/2007/PartnerControls"/>
+    </lcf76f155ced4ddcb4097134ff3c332f>
+  </documentManagement>
+</p:properties>
 </file>
 
 <file path=customXml/itemProps1.xml><?xml version="1.0" encoding="utf-8"?>
-<ds:datastoreItem xmlns:ds="http://schemas.openxmlformats.org/officeDocument/2006/customXml" ds:itemID="{B743389A-7EE0-4951-8919-E91DD69E3687}">
+<ds:datastoreItem xmlns:ds="http://schemas.openxmlformats.org/officeDocument/2006/customXml" ds:itemID="{AF8EC6D1-CB19-4400-AD0A-0C75CD884AEA}">
   <ds:schemaRefs>
-    <ds:schemaRef ds:uri="128482ec-0431-40d5-ab26-89ea2a4f3ccd"/>
-    <ds:schemaRef ds:uri="http://schemas.microsoft.com/office/2006/metadata/properties"/>
-    <ds:schemaRef ds:uri="http://schemas.microsoft.com/office/infopath/2007/PartnerControls"/>
-    <ds:schemaRef ds:uri="http://schemas.microsoft.com/sharepoint/v4"/>
-    <ds:schemaRef ds:uri="60eb0cf4-ae2a-4762-800a-cb593b869ecb"/>
+    <ds:schemaRef ds:uri="http://schemas.microsoft.com/sharepoint/v3/contenttype/forms"/>
   </ds:schemaRefs>
 </ds:datastoreItem>
 </file>
@@ -4891,9 +4918,13 @@
 </file>
 
 <file path=customXml/itemProps3.xml><?xml version="1.0" encoding="utf-8"?>
-<ds:datastoreItem xmlns:ds="http://schemas.openxmlformats.org/officeDocument/2006/customXml" ds:itemID="{AF8EC6D1-CB19-4400-AD0A-0C75CD884AEA}">
+<ds:datastoreItem xmlns:ds="http://schemas.openxmlformats.org/officeDocument/2006/customXml" ds:itemID="{B743389A-7EE0-4951-8919-E91DD69E3687}">
   <ds:schemaRefs>
-    <ds:schemaRef ds:uri="http://schemas.microsoft.com/sharepoint/v3/contenttype/forms"/>
+    <ds:schemaRef ds:uri="128482ec-0431-40d5-ab26-89ea2a4f3ccd"/>
+    <ds:schemaRef ds:uri="http://schemas.microsoft.com/office/2006/metadata/properties"/>
+    <ds:schemaRef ds:uri="http://schemas.microsoft.com/office/infopath/2007/PartnerControls"/>
+    <ds:schemaRef ds:uri="http://schemas.microsoft.com/sharepoint/v4"/>
+    <ds:schemaRef ds:uri="60eb0cf4-ae2a-4762-800a-cb593b869ecb"/>
   </ds:schemaRefs>
 </ds:datastoreItem>
 </file>
--- a/GPP_ZombieAI_AdamovDaniel_2DAE10.pptx
+++ b/GPP_ZombieAI_AdamovDaniel_2DAE10.pptx
@@ -4061,11 +4061,7 @@
           <a:p>
             <a:r>
               <a:rPr lang="en-US" dirty="0"/>
-              <a:t>Movement </a:t>
-            </a:r>
-            <a:r>
-              <a:rPr lang="en-US"/>
-              <a:t>- Exploration</a:t>
+              <a:t>Movement - Exploration</a:t>
             </a:r>
             <a:endParaRPr lang="en-BE" dirty="0"/>
           </a:p>
@@ -4089,7 +4085,9 @@
         </p:nvSpPr>
         <p:spPr/>
         <p:txBody>
-          <a:bodyPr/>
+          <a:bodyPr>
+            <a:normAutofit fontScale="62500" lnSpcReduction="20000"/>
+          </a:bodyPr>
           <a:lstStyle/>
           <a:p>
             <a:r>
@@ -4171,6 +4169,85 @@
               <a:rPr lang="en-US" sz="1600" b="1" dirty="0"/>
               <a:t>. The BT then decides what do with this information.</a:t>
             </a:r>
+          </a:p>
+          <a:p>
+            <a:pPr marL="0" indent="0">
+              <a:buNone/>
+            </a:pPr>
+            <a:endParaRPr lang="en-US" sz="1600" b="1" dirty="0"/>
+          </a:p>
+          <a:p>
+            <a:pPr marL="0" indent="0">
+              <a:buNone/>
+            </a:pPr>
+            <a:r>
+              <a:rPr lang="en-GB" sz="1600" b="1" dirty="0"/>
+              <a:t>Implemented the alternative for Handle Sight - Handle Damage:</a:t>
+            </a:r>
+          </a:p>
+          <a:p>
+            <a:pPr marL="0" indent="0">
+              <a:buNone/>
+            </a:pPr>
+            <a:r>
+              <a:rPr lang="en-GB" sz="1600" b="1" dirty="0"/>
+              <a:t>since only zombies can damage survivor, simply record and/or add the Zombie in the memory array.</a:t>
+            </a:r>
+          </a:p>
+          <a:p>
+            <a:pPr marL="0" indent="0">
+              <a:buNone/>
+            </a:pPr>
+            <a:r>
+              <a:rPr lang="en-GB" sz="1600" b="1" dirty="0"/>
+              <a:t>-------------------------------------</a:t>
+            </a:r>
+          </a:p>
+          <a:p>
+            <a:pPr marL="0" indent="0">
+              <a:buNone/>
+            </a:pPr>
+            <a:r>
+              <a:rPr lang="en-GB" sz="1600" b="1" dirty="0"/>
+              <a:t>Refresh World Memory is currently being called in an interval using a timer. </a:t>
+            </a:r>
+          </a:p>
+          <a:p>
+            <a:pPr marL="0" indent="0">
+              <a:buNone/>
+            </a:pPr>
+            <a:r>
+              <a:rPr lang="en-GB" sz="1600" b="1" dirty="0"/>
+              <a:t>The logic itself is:</a:t>
+            </a:r>
+          </a:p>
+          <a:p>
+            <a:pPr marL="0" indent="0">
+              <a:buNone/>
+            </a:pPr>
+            <a:r>
+              <a:rPr lang="en-GB" sz="1600" b="1" dirty="0"/>
+              <a:t>1. Remove old/stagnant memory for zombies, items and houses</a:t>
+            </a:r>
+          </a:p>
+          <a:p>
+            <a:pPr marL="0" indent="0">
+              <a:buNone/>
+            </a:pPr>
+            <a:r>
+              <a:rPr lang="en-GB" sz="1600" b="1" dirty="0"/>
+              <a:t>2. Update Houses visited flag</a:t>
+            </a:r>
+          </a:p>
+          <a:p>
+            <a:pPr marL="0" indent="0">
+              <a:buNone/>
+            </a:pPr>
+            <a:r>
+              <a:rPr lang="en-GB" sz="1600" b="1" dirty="0"/>
+              <a:t>3. Write to Blackboard</a:t>
+            </a:r>
+            <a:endParaRPr lang="en-US" sz="1600" b="1" dirty="0"/>
           </a:p>
           <a:p>
             <a:pPr marL="0" indent="0">
@@ -4592,12 +4669,18 @@
 </file>
 
 <file path=customXml/item1.xml><?xml version="1.0" encoding="utf-8"?>
-<?mso-contentType ?>
-<FormTemplates xmlns="http://schemas.microsoft.com/sharepoint/v3/contenttype/forms">
-  <Display>DocumentLibraryForm</Display>
-  <Edit>DocumentLibraryForm</Edit>
-  <New>DocumentLibraryForm</New>
-</FormTemplates>
+<p:properties xmlns:p="http://schemas.microsoft.com/office/2006/metadata/properties" xmlns:xsi="http://www.w3.org/2001/XMLSchema-instance" xmlns:pc="http://schemas.microsoft.com/office/infopath/2007/PartnerControls">
+  <documentManagement>
+    <IconOverlay xmlns="http://schemas.microsoft.com/sharepoint/v4" xsi:nil="true"/>
+    <TaxCatchAll xmlns="128482ec-0431-40d5-ab26-89ea2a4f3ccd" xsi:nil="true"/>
+    <m99485b88215436a82099f8287cba0b0 xmlns="128482ec-0431-40d5-ab26-89ea2a4f3ccd">
+      <Terms xmlns="http://schemas.microsoft.com/office/infopath/2007/PartnerControls"/>
+    </m99485b88215436a82099f8287cba0b0>
+    <lcf76f155ced4ddcb4097134ff3c332f xmlns="60eb0cf4-ae2a-4762-800a-cb593b869ecb">
+      <Terms xmlns="http://schemas.microsoft.com/office/infopath/2007/PartnerControls"/>
+    </lcf76f155ced4ddcb4097134ff3c332f>
+  </documentManagement>
+</p:properties>
 </file>
 
 <file path=customXml/item2.xml><?xml version="1.0" encoding="utf-8"?>
@@ -4874,24 +4957,22 @@
 </file>
 
 <file path=customXml/item3.xml><?xml version="1.0" encoding="utf-8"?>
-<p:properties xmlns:p="http://schemas.microsoft.com/office/2006/metadata/properties" xmlns:xsi="http://www.w3.org/2001/XMLSchema-instance" xmlns:pc="http://schemas.microsoft.com/office/infopath/2007/PartnerControls">
-  <documentManagement>
-    <IconOverlay xmlns="http://schemas.microsoft.com/sharepoint/v4" xsi:nil="true"/>
-    <TaxCatchAll xmlns="128482ec-0431-40d5-ab26-89ea2a4f3ccd" xsi:nil="true"/>
-    <m99485b88215436a82099f8287cba0b0 xmlns="128482ec-0431-40d5-ab26-89ea2a4f3ccd">
-      <Terms xmlns="http://schemas.microsoft.com/office/infopath/2007/PartnerControls"/>
-    </m99485b88215436a82099f8287cba0b0>
-    <lcf76f155ced4ddcb4097134ff3c332f xmlns="60eb0cf4-ae2a-4762-800a-cb593b869ecb">
-      <Terms xmlns="http://schemas.microsoft.com/office/infopath/2007/PartnerControls"/>
-    </lcf76f155ced4ddcb4097134ff3c332f>
-  </documentManagement>
-</p:properties>
+<?mso-contentType ?>
+<FormTemplates xmlns="http://schemas.microsoft.com/sharepoint/v3/contenttype/forms">
+  <Display>DocumentLibraryForm</Display>
+  <Edit>DocumentLibraryForm</Edit>
+  <New>DocumentLibraryForm</New>
+</FormTemplates>
 </file>
 
 <file path=customXml/itemProps1.xml><?xml version="1.0" encoding="utf-8"?>
-<ds:datastoreItem xmlns:ds="http://schemas.openxmlformats.org/officeDocument/2006/customXml" ds:itemID="{AF8EC6D1-CB19-4400-AD0A-0C75CD884AEA}">
+<ds:datastoreItem xmlns:ds="http://schemas.openxmlformats.org/officeDocument/2006/customXml" ds:itemID="{B743389A-7EE0-4951-8919-E91DD69E3687}">
   <ds:schemaRefs>
-    <ds:schemaRef ds:uri="http://schemas.microsoft.com/sharepoint/v3/contenttype/forms"/>
+    <ds:schemaRef ds:uri="128482ec-0431-40d5-ab26-89ea2a4f3ccd"/>
+    <ds:schemaRef ds:uri="http://schemas.microsoft.com/office/2006/metadata/properties"/>
+    <ds:schemaRef ds:uri="http://schemas.microsoft.com/office/infopath/2007/PartnerControls"/>
+    <ds:schemaRef ds:uri="http://schemas.microsoft.com/sharepoint/v4"/>
+    <ds:schemaRef ds:uri="60eb0cf4-ae2a-4762-800a-cb593b869ecb"/>
   </ds:schemaRefs>
 </ds:datastoreItem>
 </file>
@@ -4918,13 +4999,9 @@
 </file>
 
 <file path=customXml/itemProps3.xml><?xml version="1.0" encoding="utf-8"?>
-<ds:datastoreItem xmlns:ds="http://schemas.openxmlformats.org/officeDocument/2006/customXml" ds:itemID="{B743389A-7EE0-4951-8919-E91DD69E3687}">
+<ds:datastoreItem xmlns:ds="http://schemas.openxmlformats.org/officeDocument/2006/customXml" ds:itemID="{AF8EC6D1-CB19-4400-AD0A-0C75CD884AEA}">
   <ds:schemaRefs>
-    <ds:schemaRef ds:uri="128482ec-0431-40d5-ab26-89ea2a4f3ccd"/>
-    <ds:schemaRef ds:uri="http://schemas.microsoft.com/office/2006/metadata/properties"/>
-    <ds:schemaRef ds:uri="http://schemas.microsoft.com/office/infopath/2007/PartnerControls"/>
-    <ds:schemaRef ds:uri="http://schemas.microsoft.com/sharepoint/v4"/>
-    <ds:schemaRef ds:uri="60eb0cf4-ae2a-4762-800a-cb593b869ecb"/>
+    <ds:schemaRef ds:uri="http://schemas.microsoft.com/sharepoint/v3/contenttype/forms"/>
   </ds:schemaRefs>
 </ds:datastoreItem>
 </file>
--- a/GPP_ZombieAI_AdamovDaniel_2DAE10.pptx
+++ b/GPP_ZombieAI_AdamovDaniel_2DAE10.pptx
@@ -3851,10 +3851,10 @@
           <a:lstStyle/>
           <a:p>
             <a:r>
-              <a:rPr lang="en-US"/>
+              <a:rPr lang="en-US" dirty="0"/>
               <a:t>Inventory</a:t>
             </a:r>
-            <a:endParaRPr lang="en-BE"/>
+            <a:endParaRPr lang="en-BE" dirty="0"/>
           </a:p>
         </p:txBody>
       </p:sp>
@@ -3899,6 +3899,458 @@
           </a:p>
           <a:p>
             <a:endParaRPr lang="en-BE" dirty="0"/>
+          </a:p>
+        </p:txBody>
+      </p:sp>
+      <p:sp>
+        <p:nvSpPr>
+          <p:cNvPr id="5" name="TextBox 4">
+            <a:extLst>
+              <a:ext uri="{FF2B5EF4-FFF2-40B4-BE49-F238E27FC236}">
+                <a16:creationId xmlns:a16="http://schemas.microsoft.com/office/drawing/2014/main" id="{1663805A-2830-C83A-A80B-D09BE1850F09}"/>
+              </a:ext>
+            </a:extLst>
+          </p:cNvPr>
+          <p:cNvSpPr txBox="1"/>
+          <p:nvPr/>
+        </p:nvSpPr>
+        <p:spPr>
+          <a:xfrm>
+            <a:off x="102794" y="2664673"/>
+            <a:ext cx="6097022" cy="1200329"/>
+          </a:xfrm>
+          <a:prstGeom prst="rect">
+            <a:avLst/>
+          </a:prstGeom>
+          <a:noFill/>
+        </p:spPr>
+        <p:txBody>
+          <a:bodyPr wrap="square">
+            <a:spAutoFit/>
+          </a:bodyPr>
+          <a:lstStyle/>
+          <a:p>
+            <a:r>
+              <a:rPr lang="en-GB" sz="1800" dirty="0" err="1"/>
+              <a:t>AActor</a:t>
+            </a:r>
+            <a:r>
+              <a:rPr lang="en-GB" sz="1800" dirty="0"/>
+              <a:t>* </a:t>
+            </a:r>
+            <a:r>
+              <a:rPr lang="en-GB" sz="1800" dirty="0" err="1"/>
+              <a:t>SelectTargetItem</a:t>
+            </a:r>
+            <a:r>
+              <a:rPr lang="en-GB" sz="1800" dirty="0"/>
+              <a:t>() </a:t>
+            </a:r>
+            <a:r>
+              <a:rPr lang="en-GB" sz="1800" dirty="0" err="1"/>
+              <a:t>const</a:t>
+            </a:r>
+            <a:r>
+              <a:rPr lang="en-GB" sz="1800" dirty="0"/>
+              <a:t>;</a:t>
+            </a:r>
+          </a:p>
+          <a:p>
+            <a:r>
+              <a:rPr lang="en-GB" sz="1800" dirty="0"/>
+              <a:t>int32 </a:t>
+            </a:r>
+            <a:r>
+              <a:rPr lang="en-GB" sz="1800" dirty="0" err="1"/>
+              <a:t>GetItemPriority</a:t>
+            </a:r>
+            <a:r>
+              <a:rPr lang="en-GB" sz="1800" dirty="0"/>
+              <a:t>(</a:t>
+            </a:r>
+            <a:r>
+              <a:rPr lang="en-GB" sz="1800" dirty="0" err="1"/>
+              <a:t>EItemType</a:t>
+            </a:r>
+            <a:r>
+              <a:rPr lang="en-GB" sz="1800" dirty="0"/>
+              <a:t> ItemType, int32 Value) </a:t>
+            </a:r>
+            <a:r>
+              <a:rPr lang="en-GB" sz="1800" dirty="0" err="1"/>
+              <a:t>const</a:t>
+            </a:r>
+            <a:r>
+              <a:rPr lang="en-GB" sz="1800" dirty="0"/>
+              <a:t>; </a:t>
+            </a:r>
+            <a:br>
+              <a:rPr lang="en-GB" sz="1800" i="1" dirty="0"/>
+            </a:br>
+            <a:r>
+              <a:rPr lang="en-GB" sz="1800" dirty="0"/>
+              <a:t>bool </a:t>
+            </a:r>
+            <a:r>
+              <a:rPr lang="en-GB" sz="1800" dirty="0" err="1"/>
+              <a:t>HasUsableWeapon</a:t>
+            </a:r>
+            <a:r>
+              <a:rPr lang="en-GB" sz="1800" dirty="0"/>
+              <a:t>() </a:t>
+            </a:r>
+            <a:r>
+              <a:rPr lang="en-GB" sz="1800" dirty="0" err="1"/>
+              <a:t>const</a:t>
+            </a:r>
+            <a:r>
+              <a:rPr lang="en-GB" sz="1800" dirty="0"/>
+              <a:t> </a:t>
+            </a:r>
+            <a:r>
+              <a:rPr lang="en-GB" sz="1800" dirty="0" err="1"/>
+              <a:t>noexcept</a:t>
+            </a:r>
+            <a:r>
+              <a:rPr lang="en-GB" sz="1800" dirty="0"/>
+              <a:t>;</a:t>
+            </a:r>
+            <a:br>
+              <a:rPr lang="en-GB" sz="1800" i="1" dirty="0"/>
+            </a:br>
+            <a:endParaRPr lang="LID4096" dirty="0"/>
+          </a:p>
+        </p:txBody>
+      </p:sp>
+      <p:sp>
+        <p:nvSpPr>
+          <p:cNvPr id="7" name="TextBox 6">
+            <a:extLst>
+              <a:ext uri="{FF2B5EF4-FFF2-40B4-BE49-F238E27FC236}">
+                <a16:creationId xmlns:a16="http://schemas.microsoft.com/office/drawing/2014/main" id="{79A5084E-9CF4-3942-9685-4BF7B41998B1}"/>
+              </a:ext>
+            </a:extLst>
+          </p:cNvPr>
+          <p:cNvSpPr txBox="1"/>
+          <p:nvPr/>
+        </p:nvSpPr>
+        <p:spPr>
+          <a:xfrm>
+            <a:off x="6350171" y="3209605"/>
+            <a:ext cx="6097022" cy="2862322"/>
+          </a:xfrm>
+          <a:prstGeom prst="rect">
+            <a:avLst/>
+          </a:prstGeom>
+          <a:noFill/>
+        </p:spPr>
+        <p:txBody>
+          <a:bodyPr wrap="square">
+            <a:spAutoFit/>
+          </a:bodyPr>
+          <a:lstStyle/>
+          <a:p>
+            <a:pPr>
+              <a:buNone/>
+            </a:pPr>
+            <a:r>
+              <a:rPr lang="en-GB" dirty="0">
+                <a:latin typeface="JetBrains Mono"/>
+              </a:rPr>
+              <a:t>Memory c</a:t>
+            </a:r>
+            <a:r>
+              <a:rPr lang="en-GB" sz="1800" dirty="0">
+                <a:effectLst/>
+                <a:latin typeface="JetBrains Mono"/>
+              </a:rPr>
+              <a:t>ompared to Zombies:</a:t>
+            </a:r>
+          </a:p>
+          <a:p>
+            <a:pPr>
+              <a:buNone/>
+            </a:pPr>
+            <a:r>
+              <a:rPr lang="en-GB" sz="1800" dirty="0" err="1">
+                <a:effectLst/>
+                <a:latin typeface="JetBrains Mono"/>
+              </a:rPr>
+              <a:t>Items.RemoveAll</a:t>
+            </a:r>
+            <a:r>
+              <a:rPr lang="en-GB" sz="1800" dirty="0">
+                <a:effectLst/>
+                <a:latin typeface="JetBrains Mono"/>
+              </a:rPr>
+              <a:t>( [](</a:t>
+            </a:r>
+            <a:r>
+              <a:rPr lang="en-GB" sz="1800" dirty="0" err="1">
+                <a:effectLst/>
+                <a:latin typeface="JetBrains Mono"/>
+              </a:rPr>
+              <a:t>const</a:t>
+            </a:r>
+            <a:r>
+              <a:rPr lang="en-GB" sz="1800" dirty="0">
+                <a:effectLst/>
+                <a:latin typeface="JetBrains Mono"/>
+              </a:rPr>
+              <a:t> </a:t>
+            </a:r>
+            <a:r>
+              <a:rPr lang="en-GB" sz="1800" dirty="0" err="1">
+                <a:effectLst/>
+                <a:latin typeface="JetBrains Mono"/>
+              </a:rPr>
+              <a:t>FPerceivedItem</a:t>
+            </a:r>
+            <a:r>
+              <a:rPr lang="en-GB" sz="1800" dirty="0">
+                <a:effectLst/>
+                <a:latin typeface="JetBrains Mono"/>
+              </a:rPr>
+              <a:t>&amp; R)</a:t>
+            </a:r>
+            <a:br>
+              <a:rPr lang="en-GB" sz="1800" dirty="0">
+                <a:effectLst/>
+                <a:latin typeface="JetBrains Mono"/>
+              </a:rPr>
+            </a:br>
+            <a:r>
+              <a:rPr lang="en-GB" sz="1800" dirty="0">
+                <a:effectLst/>
+                <a:latin typeface="JetBrains Mono"/>
+              </a:rPr>
+              <a:t>{</a:t>
+            </a:r>
+            <a:br>
+              <a:rPr lang="en-GB" sz="1800" dirty="0">
+                <a:effectLst/>
+                <a:latin typeface="JetBrains Mono"/>
+              </a:rPr>
+            </a:br>
+            <a:r>
+              <a:rPr lang="en-GB" sz="1800" dirty="0">
+                <a:effectLst/>
+                <a:latin typeface="JetBrains Mono"/>
+              </a:rPr>
+              <a:t>    return !</a:t>
+            </a:r>
+            <a:r>
+              <a:rPr lang="en-GB" sz="1800" dirty="0" err="1">
+                <a:effectLst/>
+                <a:latin typeface="JetBrains Mono"/>
+              </a:rPr>
+              <a:t>R.Actor.IsValid</a:t>
+            </a:r>
+            <a:r>
+              <a:rPr lang="en-GB" sz="1800" dirty="0">
+                <a:effectLst/>
+                <a:latin typeface="JetBrains Mono"/>
+              </a:rPr>
+              <a:t>() || </a:t>
+            </a:r>
+            <a:r>
+              <a:rPr lang="en-GB" sz="1800" dirty="0" err="1">
+                <a:effectLst/>
+                <a:latin typeface="JetBrains Mono"/>
+              </a:rPr>
+              <a:t>R.Actor</a:t>
+            </a:r>
+            <a:r>
+              <a:rPr lang="en-GB" sz="1800" dirty="0">
+                <a:effectLst/>
+                <a:latin typeface="JetBrains Mono"/>
+              </a:rPr>
+              <a:t>-&gt;</a:t>
+            </a:r>
+            <a:r>
+              <a:rPr lang="en-GB" sz="1800" dirty="0" err="1">
+                <a:effectLst/>
+                <a:latin typeface="JetBrains Mono"/>
+              </a:rPr>
+              <a:t>IsHidden</a:t>
+            </a:r>
+            <a:r>
+              <a:rPr lang="en-GB" sz="1800" dirty="0">
+                <a:effectLst/>
+                <a:latin typeface="JetBrains Mono"/>
+              </a:rPr>
+              <a:t>();</a:t>
+            </a:r>
+            <a:br>
+              <a:rPr lang="en-GB" sz="1800" dirty="0">
+                <a:effectLst/>
+                <a:latin typeface="JetBrains Mono"/>
+              </a:rPr>
+            </a:br>
+            <a:r>
+              <a:rPr lang="en-GB" sz="1800" dirty="0">
+                <a:effectLst/>
+                <a:latin typeface="JetBrains Mono"/>
+              </a:rPr>
+              <a:t>});</a:t>
+            </a:r>
+            <a:br>
+              <a:rPr lang="en-GB" sz="1800" dirty="0">
+                <a:effectLst/>
+                <a:latin typeface="JetBrains Mono"/>
+              </a:rPr>
+            </a:br>
+            <a:r>
+              <a:rPr lang="en-GB" sz="1800" dirty="0" err="1">
+                <a:effectLst/>
+                <a:latin typeface="JetBrains Mono"/>
+              </a:rPr>
+              <a:t>Zombies.RemoveAll</a:t>
+            </a:r>
+            <a:r>
+              <a:rPr lang="en-GB" sz="1800" dirty="0">
+                <a:effectLst/>
+                <a:latin typeface="JetBrains Mono"/>
+              </a:rPr>
+              <a:t>([&amp;](</a:t>
+            </a:r>
+            <a:r>
+              <a:rPr lang="en-GB" sz="1800" dirty="0" err="1">
+                <a:effectLst/>
+                <a:latin typeface="JetBrains Mono"/>
+              </a:rPr>
+              <a:t>const</a:t>
+            </a:r>
+            <a:r>
+              <a:rPr lang="en-GB" sz="1800" dirty="0">
+                <a:effectLst/>
+                <a:latin typeface="JetBrains Mono"/>
+              </a:rPr>
+              <a:t> </a:t>
+            </a:r>
+            <a:r>
+              <a:rPr lang="en-GB" sz="1800" dirty="0" err="1">
+                <a:effectLst/>
+                <a:latin typeface="JetBrains Mono"/>
+              </a:rPr>
+              <a:t>FPerceivedActor</a:t>
+            </a:r>
+            <a:r>
+              <a:rPr lang="en-GB" sz="1800" dirty="0">
+                <a:effectLst/>
+                <a:latin typeface="JetBrains Mono"/>
+              </a:rPr>
+              <a:t>&amp; R)</a:t>
+            </a:r>
+            <a:br>
+              <a:rPr lang="en-GB" sz="1800" dirty="0">
+                <a:effectLst/>
+                <a:latin typeface="JetBrains Mono"/>
+              </a:rPr>
+            </a:br>
+            <a:r>
+              <a:rPr lang="en-GB" sz="1800" dirty="0">
+                <a:effectLst/>
+                <a:latin typeface="JetBrains Mono"/>
+              </a:rPr>
+              <a:t>{</a:t>
+            </a:r>
+            <a:br>
+              <a:rPr lang="en-GB" sz="1800" dirty="0">
+                <a:effectLst/>
+                <a:latin typeface="JetBrains Mono"/>
+              </a:rPr>
+            </a:br>
+            <a:r>
+              <a:rPr lang="en-GB" sz="1800" dirty="0">
+                <a:effectLst/>
+                <a:latin typeface="JetBrains Mono"/>
+              </a:rPr>
+              <a:t>    return !</a:t>
+            </a:r>
+            <a:r>
+              <a:rPr lang="en-GB" sz="1800" dirty="0" err="1">
+                <a:effectLst/>
+                <a:latin typeface="JetBrains Mono"/>
+              </a:rPr>
+              <a:t>R.Actor.IsValid</a:t>
+            </a:r>
+            <a:r>
+              <a:rPr lang="en-GB" sz="1800" dirty="0">
+                <a:effectLst/>
+                <a:latin typeface="JetBrains Mono"/>
+              </a:rPr>
+              <a:t>() || (!</a:t>
+            </a:r>
+            <a:r>
+              <a:rPr lang="en-GB" sz="1800" dirty="0" err="1">
+                <a:effectLst/>
+                <a:latin typeface="JetBrains Mono"/>
+              </a:rPr>
+              <a:t>R.bIsVisible</a:t>
+            </a:r>
+            <a:r>
+              <a:rPr lang="en-GB" sz="1800" dirty="0">
+                <a:effectLst/>
+                <a:latin typeface="JetBrains Mono"/>
+              </a:rPr>
+              <a:t> &amp;&amp; (</a:t>
+            </a:r>
+            <a:r>
+              <a:rPr lang="en-GB" sz="1800" dirty="0" err="1">
+                <a:effectLst/>
+                <a:latin typeface="JetBrains Mono"/>
+              </a:rPr>
+              <a:t>TimeNow</a:t>
+            </a:r>
+            <a:r>
+              <a:rPr lang="en-GB" sz="1800" dirty="0">
+                <a:effectLst/>
+                <a:latin typeface="JetBrains Mono"/>
+              </a:rPr>
+              <a:t> - </a:t>
+            </a:r>
+            <a:r>
+              <a:rPr lang="en-GB" sz="1800" dirty="0" err="1">
+                <a:effectLst/>
+                <a:latin typeface="JetBrains Mono"/>
+              </a:rPr>
+              <a:t>R.LastSeenTime</a:t>
+            </a:r>
+            <a:r>
+              <a:rPr lang="en-GB" sz="1800" dirty="0">
+                <a:effectLst/>
+                <a:latin typeface="JetBrains Mono"/>
+              </a:rPr>
+              <a:t>) &gt; </a:t>
+            </a:r>
+            <a:r>
+              <a:rPr lang="en-GB" sz="1800" dirty="0" err="1">
+                <a:effectLst/>
+                <a:latin typeface="JetBrains Mono"/>
+              </a:rPr>
+              <a:t>ThreatMemoryDuration</a:t>
+            </a:r>
+            <a:r>
+              <a:rPr lang="en-GB" sz="1800" dirty="0">
+                <a:effectLst/>
+                <a:latin typeface="JetBrains Mono"/>
+              </a:rPr>
+              <a:t>);</a:t>
+            </a:r>
+            <a:br>
+              <a:rPr lang="en-GB" sz="1800" dirty="0">
+                <a:effectLst/>
+                <a:latin typeface="JetBrains Mono"/>
+              </a:rPr>
+            </a:br>
+            <a:r>
+              <a:rPr lang="en-GB" sz="1800" dirty="0">
+                <a:effectLst/>
+                <a:latin typeface="JetBrains Mono"/>
+              </a:rPr>
+              <a:t>});</a:t>
+            </a:r>
           </a:p>
         </p:txBody>
       </p:sp>
@@ -4254,6 +4706,122 @@
               <a:buNone/>
             </a:pPr>
             <a:endParaRPr lang="en-BE" dirty="0"/>
+          </a:p>
+        </p:txBody>
+      </p:sp>
+      <p:sp>
+        <p:nvSpPr>
+          <p:cNvPr id="4" name="TextBox 3">
+            <a:extLst>
+              <a:ext uri="{FF2B5EF4-FFF2-40B4-BE49-F238E27FC236}">
+                <a16:creationId xmlns:a16="http://schemas.microsoft.com/office/drawing/2014/main" id="{9313C08B-A0CE-CE58-9502-6C506F51C298}"/>
+              </a:ext>
+            </a:extLst>
+          </p:cNvPr>
+          <p:cNvSpPr txBox="1"/>
+          <p:nvPr/>
+        </p:nvSpPr>
+        <p:spPr>
+          <a:xfrm>
+            <a:off x="7990261" y="595281"/>
+            <a:ext cx="3166648" cy="954107"/>
+          </a:xfrm>
+          <a:prstGeom prst="rect">
+            <a:avLst/>
+          </a:prstGeom>
+          <a:noFill/>
+        </p:spPr>
+        <p:txBody>
+          <a:bodyPr wrap="square" rtlCol="0">
+            <a:spAutoFit/>
+          </a:bodyPr>
+          <a:lstStyle/>
+          <a:p>
+            <a:r>
+              <a:rPr lang="en-GB" sz="1400" i="1" dirty="0"/>
+              <a:t>// ----- Hardest Logic of the class -----</a:t>
+            </a:r>
+            <a:br>
+              <a:rPr lang="en-GB" sz="1400" i="1" dirty="0"/>
+            </a:br>
+            <a:r>
+              <a:rPr lang="en-GB" sz="1400" dirty="0" err="1"/>
+              <a:t>AActor</a:t>
+            </a:r>
+            <a:r>
+              <a:rPr lang="en-GB" sz="1400" dirty="0"/>
+              <a:t>* </a:t>
+            </a:r>
+            <a:r>
+              <a:rPr lang="en-GB" sz="1400" dirty="0" err="1"/>
+              <a:t>SelectThreat</a:t>
+            </a:r>
+            <a:r>
+              <a:rPr lang="en-GB" sz="1400" dirty="0"/>
+              <a:t>() </a:t>
+            </a:r>
+            <a:r>
+              <a:rPr lang="en-GB" sz="1400" dirty="0" err="1"/>
+              <a:t>const</a:t>
+            </a:r>
+            <a:r>
+              <a:rPr lang="en-GB" sz="1400" dirty="0"/>
+              <a:t>; </a:t>
+            </a:r>
+          </a:p>
+          <a:p>
+            <a:r>
+              <a:rPr lang="en-GB" sz="1400" dirty="0" err="1"/>
+              <a:t>AActor</a:t>
+            </a:r>
+            <a:r>
+              <a:rPr lang="en-GB" sz="1400" dirty="0"/>
+              <a:t>* </a:t>
+            </a:r>
+            <a:r>
+              <a:rPr lang="en-GB" sz="1400" dirty="0" err="1"/>
+              <a:t>SelectTargetItem</a:t>
+            </a:r>
+            <a:r>
+              <a:rPr lang="en-GB" sz="1400" dirty="0"/>
+              <a:t>() </a:t>
+            </a:r>
+            <a:r>
+              <a:rPr lang="en-GB" sz="1400" dirty="0" err="1"/>
+              <a:t>const</a:t>
+            </a:r>
+            <a:r>
+              <a:rPr lang="en-GB" sz="1400" dirty="0"/>
+              <a:t>;</a:t>
+            </a:r>
+            <a:br>
+              <a:rPr lang="en-GB" sz="1400" i="1" dirty="0"/>
+            </a:br>
+            <a:r>
+              <a:rPr lang="en-GB" sz="1400" dirty="0" err="1"/>
+              <a:t>AActor</a:t>
+            </a:r>
+            <a:r>
+              <a:rPr lang="en-GB" sz="1400" dirty="0"/>
+              <a:t>* </a:t>
+            </a:r>
+            <a:r>
+              <a:rPr lang="en-GB" sz="1400" dirty="0" err="1"/>
+              <a:t>SelectHouseTarget</a:t>
+            </a:r>
+            <a:r>
+              <a:rPr lang="en-GB" sz="1400" dirty="0"/>
+              <a:t>() </a:t>
+            </a:r>
+            <a:r>
+              <a:rPr lang="en-GB" sz="1400" dirty="0" err="1"/>
+              <a:t>const</a:t>
+            </a:r>
+            <a:r>
+              <a:rPr lang="en-GB" sz="1400" dirty="0"/>
+              <a:t>;</a:t>
+            </a:r>
+            <a:endParaRPr lang="LID4096" sz="1400" dirty="0"/>
           </a:p>
         </p:txBody>
       </p:sp>
@@ -4669,18 +5237,12 @@
 </file>
 
 <file path=customXml/item1.xml><?xml version="1.0" encoding="utf-8"?>
-<p:properties xmlns:p="http://schemas.microsoft.com/office/2006/metadata/properties" xmlns:xsi="http://www.w3.org/2001/XMLSchema-instance" xmlns:pc="http://schemas.microsoft.com/office/infopath/2007/PartnerControls">
-  <documentManagement>
-    <IconOverlay xmlns="http://schemas.microsoft.com/sharepoint/v4" xsi:nil="true"/>
-    <TaxCatchAll xmlns="128482ec-0431-40d5-ab26-89ea2a4f3ccd" xsi:nil="true"/>
-    <m99485b88215436a82099f8287cba0b0 xmlns="128482ec-0431-40d5-ab26-89ea2a4f3ccd">
-      <Terms xmlns="http://schemas.microsoft.com/office/infopath/2007/PartnerControls"/>
-    </m99485b88215436a82099f8287cba0b0>
-    <lcf76f155ced4ddcb4097134ff3c332f xmlns="60eb0cf4-ae2a-4762-800a-cb593b869ecb">
-      <Terms xmlns="http://schemas.microsoft.com/office/infopath/2007/PartnerControls"/>
-    </lcf76f155ced4ddcb4097134ff3c332f>
-  </documentManagement>
-</p:properties>
+<?mso-contentType ?>
+<FormTemplates xmlns="http://schemas.microsoft.com/sharepoint/v3/contenttype/forms">
+  <Display>DocumentLibraryForm</Display>
+  <Edit>DocumentLibraryForm</Edit>
+  <New>DocumentLibraryForm</New>
+</FormTemplates>
 </file>
 
 <file path=customXml/item2.xml><?xml version="1.0" encoding="utf-8"?>
@@ -4957,22 +5519,24 @@
 </file>
 
 <file path=customXml/item3.xml><?xml version="1.0" encoding="utf-8"?>
-<?mso-contentType ?>
-<FormTemplates xmlns="http://schemas.microsoft.com/sharepoint/v3/contenttype/forms">
-  <Display>DocumentLibraryForm</Display>
-  <Edit>DocumentLibraryForm</Edit>
-  <New>DocumentLibraryForm</New>
-</FormTemplates>
+<p:properties xmlns:p="http://schemas.microsoft.com/office/2006/metadata/properties" xmlns:xsi="http://www.w3.org/2001/XMLSchema-instance" xmlns:pc="http://schemas.microsoft.com/office/infopath/2007/PartnerControls">
+  <documentManagement>
+    <IconOverlay xmlns="http://schemas.microsoft.com/sharepoint/v4" xsi:nil="true"/>
+    <TaxCatchAll xmlns="128482ec-0431-40d5-ab26-89ea2a4f3ccd" xsi:nil="true"/>
+    <m99485b88215436a82099f8287cba0b0 xmlns="128482ec-0431-40d5-ab26-89ea2a4f3ccd">
+      <Terms xmlns="http://schemas.microsoft.com/office/infopath/2007/PartnerControls"/>
+    </m99485b88215436a82099f8287cba0b0>
+    <lcf76f155ced4ddcb4097134ff3c332f xmlns="60eb0cf4-ae2a-4762-800a-cb593b869ecb">
+      <Terms xmlns="http://schemas.microsoft.com/office/infopath/2007/PartnerControls"/>
+    </lcf76f155ced4ddcb4097134ff3c332f>
+  </documentManagement>
+</p:properties>
 </file>
 
 <file path=customXml/itemProps1.xml><?xml version="1.0" encoding="utf-8"?>
-<ds:datastoreItem xmlns:ds="http://schemas.openxmlformats.org/officeDocument/2006/customXml" ds:itemID="{B743389A-7EE0-4951-8919-E91DD69E3687}">
+<ds:datastoreItem xmlns:ds="http://schemas.openxmlformats.org/officeDocument/2006/customXml" ds:itemID="{AF8EC6D1-CB19-4400-AD0A-0C75CD884AEA}">
   <ds:schemaRefs>
-    <ds:schemaRef ds:uri="128482ec-0431-40d5-ab26-89ea2a4f3ccd"/>
-    <ds:schemaRef ds:uri="http://schemas.microsoft.com/office/2006/metadata/properties"/>
-    <ds:schemaRef ds:uri="http://schemas.microsoft.com/office/infopath/2007/PartnerControls"/>
-    <ds:schemaRef ds:uri="http://schemas.microsoft.com/sharepoint/v4"/>
-    <ds:schemaRef ds:uri="60eb0cf4-ae2a-4762-800a-cb593b869ecb"/>
+    <ds:schemaRef ds:uri="http://schemas.microsoft.com/sharepoint/v3/contenttype/forms"/>
   </ds:schemaRefs>
 </ds:datastoreItem>
 </file>
@@ -4999,9 +5563,13 @@
 </file>
 
 <file path=customXml/itemProps3.xml><?xml version="1.0" encoding="utf-8"?>
-<ds:datastoreItem xmlns:ds="http://schemas.openxmlformats.org/officeDocument/2006/customXml" ds:itemID="{AF8EC6D1-CB19-4400-AD0A-0C75CD884AEA}">
+<ds:datastoreItem xmlns:ds="http://schemas.openxmlformats.org/officeDocument/2006/customXml" ds:itemID="{B743389A-7EE0-4951-8919-E91DD69E3687}">
   <ds:schemaRefs>
-    <ds:schemaRef ds:uri="http://schemas.microsoft.com/sharepoint/v3/contenttype/forms"/>
+    <ds:schemaRef ds:uri="128482ec-0431-40d5-ab26-89ea2a4f3ccd"/>
+    <ds:schemaRef ds:uri="http://schemas.microsoft.com/office/2006/metadata/properties"/>
+    <ds:schemaRef ds:uri="http://schemas.microsoft.com/office/infopath/2007/PartnerControls"/>
+    <ds:schemaRef ds:uri="http://schemas.microsoft.com/sharepoint/v4"/>
+    <ds:schemaRef ds:uri="60eb0cf4-ae2a-4762-800a-cb593b869ecb"/>
   </ds:schemaRefs>
 </ds:datastoreItem>
 </file>
--- a/GPP_ZombieAI_AdamovDaniel_2DAE10.pptx
+++ b/GPP_ZombieAI_AdamovDaniel_2DAE10.pptx
@@ -405,7 +405,7 @@
           <a:p>
             <a:fld id="{82085877-2B37-48E7-8B6D-4D4ED486130A}" type="datetimeFigureOut">
               <a:rPr lang="en-BE" smtClean="0"/>
-              <a:t>05/31/2026</a:t>
+              <a:t>06/01/2026</a:t>
             </a:fld>
             <a:endParaRPr lang="en-BE"/>
           </a:p>
@@ -605,7 +605,7 @@
           <a:p>
             <a:fld id="{82085877-2B37-48E7-8B6D-4D4ED486130A}" type="datetimeFigureOut">
               <a:rPr lang="en-BE" smtClean="0"/>
-              <a:t>05/31/2026</a:t>
+              <a:t>06/01/2026</a:t>
             </a:fld>
             <a:endParaRPr lang="en-BE"/>
           </a:p>
@@ -815,7 +815,7 @@
           <a:p>
             <a:fld id="{82085877-2B37-48E7-8B6D-4D4ED486130A}" type="datetimeFigureOut">
               <a:rPr lang="en-BE" smtClean="0"/>
-              <a:t>05/31/2026</a:t>
+              <a:t>06/01/2026</a:t>
             </a:fld>
             <a:endParaRPr lang="en-BE"/>
           </a:p>
@@ -1015,7 +1015,7 @@
           <a:p>
             <a:fld id="{82085877-2B37-48E7-8B6D-4D4ED486130A}" type="datetimeFigureOut">
               <a:rPr lang="en-BE" smtClean="0"/>
-              <a:t>05/31/2026</a:t>
+              <a:t>06/01/2026</a:t>
             </a:fld>
             <a:endParaRPr lang="en-BE"/>
           </a:p>
@@ -1291,7 +1291,7 @@
           <a:p>
             <a:fld id="{82085877-2B37-48E7-8B6D-4D4ED486130A}" type="datetimeFigureOut">
               <a:rPr lang="en-BE" smtClean="0"/>
-              <a:t>05/31/2026</a:t>
+              <a:t>06/01/2026</a:t>
             </a:fld>
             <a:endParaRPr lang="en-BE"/>
           </a:p>
@@ -1559,7 +1559,7 @@
           <a:p>
             <a:fld id="{82085877-2B37-48E7-8B6D-4D4ED486130A}" type="datetimeFigureOut">
               <a:rPr lang="en-BE" smtClean="0"/>
-              <a:t>05/31/2026</a:t>
+              <a:t>06/01/2026</a:t>
             </a:fld>
             <a:endParaRPr lang="en-BE"/>
           </a:p>
@@ -1974,7 +1974,7 @@
           <a:p>
             <a:fld id="{82085877-2B37-48E7-8B6D-4D4ED486130A}" type="datetimeFigureOut">
               <a:rPr lang="en-BE" smtClean="0"/>
-              <a:t>05/31/2026</a:t>
+              <a:t>06/01/2026</a:t>
             </a:fld>
             <a:endParaRPr lang="en-BE"/>
           </a:p>
@@ -2116,7 +2116,7 @@
           <a:p>
             <a:fld id="{82085877-2B37-48E7-8B6D-4D4ED486130A}" type="datetimeFigureOut">
               <a:rPr lang="en-BE" smtClean="0"/>
-              <a:t>05/31/2026</a:t>
+              <a:t>06/01/2026</a:t>
             </a:fld>
             <a:endParaRPr lang="en-BE"/>
           </a:p>
@@ -2229,7 +2229,7 @@
           <a:p>
             <a:fld id="{82085877-2B37-48E7-8B6D-4D4ED486130A}" type="datetimeFigureOut">
               <a:rPr lang="en-BE" smtClean="0"/>
-              <a:t>05/31/2026</a:t>
+              <a:t>06/01/2026</a:t>
             </a:fld>
             <a:endParaRPr lang="en-BE"/>
           </a:p>
@@ -2542,7 +2542,7 @@
           <a:p>
             <a:fld id="{82085877-2B37-48E7-8B6D-4D4ED486130A}" type="datetimeFigureOut">
               <a:rPr lang="en-BE" smtClean="0"/>
-              <a:t>05/31/2026</a:t>
+              <a:t>06/01/2026</a:t>
             </a:fld>
             <a:endParaRPr lang="en-BE"/>
           </a:p>
@@ -2831,7 +2831,7 @@
           <a:p>
             <a:fld id="{82085877-2B37-48E7-8B6D-4D4ED486130A}" type="datetimeFigureOut">
               <a:rPr lang="en-BE" smtClean="0"/>
-              <a:t>05/31/2026</a:t>
+              <a:t>06/01/2026</a:t>
             </a:fld>
             <a:endParaRPr lang="en-BE"/>
           </a:p>
@@ -3074,7 +3074,7 @@
           <a:p>
             <a:fld id="{82085877-2B37-48E7-8B6D-4D4ED486130A}" type="datetimeFigureOut">
               <a:rPr lang="en-BE" smtClean="0"/>
-              <a:t>05/31/2026</a:t>
+              <a:t>06/01/2026</a:t>
             </a:fld>
             <a:endParaRPr lang="en-BE"/>
           </a:p>
@@ -4825,6 +4825,73 @@
           </a:p>
         </p:txBody>
       </p:sp>
+      <p:sp>
+        <p:nvSpPr>
+          <p:cNvPr id="6" name="TextBox 5">
+            <a:extLst>
+              <a:ext uri="{FF2B5EF4-FFF2-40B4-BE49-F238E27FC236}">
+                <a16:creationId xmlns:a16="http://schemas.microsoft.com/office/drawing/2014/main" id="{4F87ED8C-910F-DA03-47CA-72F93D9CBA04}"/>
+              </a:ext>
+            </a:extLst>
+          </p:cNvPr>
+          <p:cNvSpPr txBox="1"/>
+          <p:nvPr/>
+        </p:nvSpPr>
+        <p:spPr>
+          <a:xfrm>
+            <a:off x="5724206" y="4834572"/>
+            <a:ext cx="6097022" cy="1477328"/>
+          </a:xfrm>
+          <a:prstGeom prst="rect">
+            <a:avLst/>
+          </a:prstGeom>
+          <a:noFill/>
+        </p:spPr>
+        <p:txBody>
+          <a:bodyPr wrap="square">
+            <a:spAutoFit/>
+          </a:bodyPr>
+          <a:lstStyle/>
+          <a:p>
+            <a:r>
+              <a:rPr lang="en-GB" b="0" i="0" dirty="0">
+                <a:effectLst/>
+                <a:latin typeface="SFMono-Regular"/>
+              </a:rPr>
+              <a:t>The survivor would often get stuck in the visited house range AFTER </a:t>
+            </a:r>
+            <a:r>
+              <a:rPr lang="en-GB" b="0" i="0" dirty="0" err="1">
+                <a:effectLst/>
+                <a:latin typeface="SFMono-Regular"/>
+              </a:rPr>
+              <a:t>MoveTo</a:t>
+            </a:r>
+            <a:r>
+              <a:rPr lang="en-GB" b="0" i="0" dirty="0">
+                <a:effectLst/>
+                <a:latin typeface="SFMono-Regular"/>
+              </a:rPr>
+              <a:t> has already returned succeeded for the </a:t>
+            </a:r>
+            <a:r>
+              <a:rPr lang="en-GB" b="0" i="0" dirty="0" err="1">
+                <a:effectLst/>
+                <a:latin typeface="SFMono-Regular"/>
+              </a:rPr>
+              <a:t>InvestigateHouse</a:t>
+            </a:r>
+            <a:r>
+              <a:rPr lang="en-GB" b="0" i="0" dirty="0">
+                <a:effectLst/>
+                <a:latin typeface="SFMono-Regular"/>
+              </a:rPr>
+              <a:t> sequence. This made the survivor stuck infinitely. Now a Stuck Check is added with an interval that marks the investigated house as visited and moves on.</a:t>
+            </a:r>
+            <a:endParaRPr lang="LID4096" dirty="0"/>
+          </a:p>
+        </p:txBody>
+      </p:sp>
     </p:spTree>
     <p:extLst>
       <p:ext uri="{BB962C8B-B14F-4D97-AF65-F5344CB8AC3E}">
@@ -5237,12 +5304,18 @@
 </file>
 
 <file path=customXml/item1.xml><?xml version="1.0" encoding="utf-8"?>
-<?mso-contentType ?>
-<FormTemplates xmlns="http://schemas.microsoft.com/sharepoint/v3/contenttype/forms">
-  <Display>DocumentLibraryForm</Display>
-  <Edit>DocumentLibraryForm</Edit>
-  <New>DocumentLibraryForm</New>
-</FormTemplates>
+<p:properties xmlns:p="http://schemas.microsoft.com/office/2006/metadata/properties" xmlns:xsi="http://www.w3.org/2001/XMLSchema-instance" xmlns:pc="http://schemas.microsoft.com/office/infopath/2007/PartnerControls">
+  <documentManagement>
+    <IconOverlay xmlns="http://schemas.microsoft.com/sharepoint/v4" xsi:nil="true"/>
+    <TaxCatchAll xmlns="128482ec-0431-40d5-ab26-89ea2a4f3ccd" xsi:nil="true"/>
+    <m99485b88215436a82099f8287cba0b0 xmlns="128482ec-0431-40d5-ab26-89ea2a4f3ccd">
+      <Terms xmlns="http://schemas.microsoft.com/office/infopath/2007/PartnerControls"/>
+    </m99485b88215436a82099f8287cba0b0>
+    <lcf76f155ced4ddcb4097134ff3c332f xmlns="60eb0cf4-ae2a-4762-800a-cb593b869ecb">
+      <Terms xmlns="http://schemas.microsoft.com/office/infopath/2007/PartnerControls"/>
+    </lcf76f155ced4ddcb4097134ff3c332f>
+  </documentManagement>
+</p:properties>
 </file>
 
 <file path=customXml/item2.xml><?xml version="1.0" encoding="utf-8"?>
@@ -5519,24 +5592,22 @@
 </file>
 
 <file path=customXml/item3.xml><?xml version="1.0" encoding="utf-8"?>
-<p:properties xmlns:p="http://schemas.microsoft.com/office/2006/metadata/properties" xmlns:xsi="http://www.w3.org/2001/XMLSchema-instance" xmlns:pc="http://schemas.microsoft.com/office/infopath/2007/PartnerControls">
-  <documentManagement>
-    <IconOverlay xmlns="http://schemas.microsoft.com/sharepoint/v4" xsi:nil="true"/>
-    <TaxCatchAll xmlns="128482ec-0431-40d5-ab26-89ea2a4f3ccd" xsi:nil="true"/>
-    <m99485b88215436a82099f8287cba0b0 xmlns="128482ec-0431-40d5-ab26-89ea2a4f3ccd">
-      <Terms xmlns="http://schemas.microsoft.com/office/infopath/2007/PartnerControls"/>
-    </m99485b88215436a82099f8287cba0b0>
-    <lcf76f155ced4ddcb4097134ff3c332f xmlns="60eb0cf4-ae2a-4762-800a-cb593b869ecb">
-      <Terms xmlns="http://schemas.microsoft.com/office/infopath/2007/PartnerControls"/>
-    </lcf76f155ced4ddcb4097134ff3c332f>
-  </documentManagement>
-</p:properties>
+<?mso-contentType ?>
+<FormTemplates xmlns="http://schemas.microsoft.com/sharepoint/v3/contenttype/forms">
+  <Display>DocumentLibraryForm</Display>
+  <Edit>DocumentLibraryForm</Edit>
+  <New>DocumentLibraryForm</New>
+</FormTemplates>
 </file>
 
 <file path=customXml/itemProps1.xml><?xml version="1.0" encoding="utf-8"?>
-<ds:datastoreItem xmlns:ds="http://schemas.openxmlformats.org/officeDocument/2006/customXml" ds:itemID="{AF8EC6D1-CB19-4400-AD0A-0C75CD884AEA}">
+<ds:datastoreItem xmlns:ds="http://schemas.openxmlformats.org/officeDocument/2006/customXml" ds:itemID="{B743389A-7EE0-4951-8919-E91DD69E3687}">
   <ds:schemaRefs>
-    <ds:schemaRef ds:uri="http://schemas.microsoft.com/sharepoint/v3/contenttype/forms"/>
+    <ds:schemaRef ds:uri="128482ec-0431-40d5-ab26-89ea2a4f3ccd"/>
+    <ds:schemaRef ds:uri="http://schemas.microsoft.com/office/2006/metadata/properties"/>
+    <ds:schemaRef ds:uri="http://schemas.microsoft.com/office/infopath/2007/PartnerControls"/>
+    <ds:schemaRef ds:uri="http://schemas.microsoft.com/sharepoint/v4"/>
+    <ds:schemaRef ds:uri="60eb0cf4-ae2a-4762-800a-cb593b869ecb"/>
   </ds:schemaRefs>
 </ds:datastoreItem>
 </file>
@@ -5563,13 +5634,9 @@
 </file>
 
 <file path=customXml/itemProps3.xml><?xml version="1.0" encoding="utf-8"?>
-<ds:datastoreItem xmlns:ds="http://schemas.openxmlformats.org/officeDocument/2006/customXml" ds:itemID="{B743389A-7EE0-4951-8919-E91DD69E3687}">
+<ds:datastoreItem xmlns:ds="http://schemas.openxmlformats.org/officeDocument/2006/customXml" ds:itemID="{AF8EC6D1-CB19-4400-AD0A-0C75CD884AEA}">
   <ds:schemaRefs>
-    <ds:schemaRef ds:uri="128482ec-0431-40d5-ab26-89ea2a4f3ccd"/>
-    <ds:schemaRef ds:uri="http://schemas.microsoft.com/office/2006/metadata/properties"/>
-    <ds:schemaRef ds:uri="http://schemas.microsoft.com/office/infopath/2007/PartnerControls"/>
-    <ds:schemaRef ds:uri="http://schemas.microsoft.com/sharepoint/v4"/>
-    <ds:schemaRef ds:uri="60eb0cf4-ae2a-4762-800a-cb593b869ecb"/>
+    <ds:schemaRef ds:uri="http://schemas.microsoft.com/sharepoint/v3/contenttype/forms"/>
   </ds:schemaRefs>
 </ds:datastoreItem>
 </file>
--- a/GPP_ZombieAI_AdamovDaniel_2DAE10.pptx
+++ b/GPP_ZombieAI_AdamovDaniel_2DAE10.pptx
@@ -3738,10 +3738,10 @@
           <a:lstStyle/>
           <a:p>
             <a:r>
-              <a:rPr lang="en-US"/>
+              <a:rPr lang="en-US" dirty="0"/>
               <a:t>Enemy handling</a:t>
             </a:r>
-            <a:endParaRPr lang="en-BE"/>
+            <a:endParaRPr lang="en-BE" dirty="0"/>
           </a:p>
         </p:txBody>
       </p:sp>
@@ -3767,7 +3767,7 @@
           <a:lstStyle/>
           <a:p>
             <a:r>
-              <a:rPr lang="en-US" i="1">
+              <a:rPr lang="en-US" i="1" dirty="0">
                 <a:solidFill>
                   <a:schemeClr val="bg1">
                     <a:lumMod val="75000"/>
@@ -3776,7 +3776,7 @@
               </a:rPr>
               <a:t>How does your agent deal with enemies (aiming, shooting, item usage, avoidance, hiding, usage of sprint, …)?</a:t>
             </a:r>
-            <a:endParaRPr lang="en-BE" i="1">
+            <a:endParaRPr lang="en-BE" i="1" dirty="0">
               <a:solidFill>
                 <a:schemeClr val="bg1">
                   <a:lumMod val="75000"/>
@@ -3786,7 +3786,7 @@
           </a:p>
           <a:p>
             <a:r>
-              <a:rPr lang="en-US" i="1">
+              <a:rPr lang="en-US" i="1" dirty="0">
                 <a:solidFill>
                   <a:schemeClr val="bg1">
                     <a:lumMod val="75000"/>
@@ -3795,7 +3795,164 @@
               </a:rPr>
               <a:t>USE IMAGES/GIFS</a:t>
             </a:r>
-            <a:endParaRPr lang="en-BE"/>
+          </a:p>
+          <a:p>
+            <a:endParaRPr lang="en-US" i="1" dirty="0">
+              <a:solidFill>
+                <a:schemeClr val="bg1">
+                  <a:lumMod val="75000"/>
+                </a:schemeClr>
+              </a:solidFill>
+            </a:endParaRPr>
+          </a:p>
+          <a:p>
+            <a:pPr marL="0" indent="0">
+              <a:buNone/>
+            </a:pPr>
+            <a:endParaRPr lang="en-US" i="1" dirty="0">
+              <a:solidFill>
+                <a:schemeClr val="bg1">
+                  <a:lumMod val="75000"/>
+                </a:schemeClr>
+              </a:solidFill>
+            </a:endParaRPr>
+          </a:p>
+        </p:txBody>
+      </p:sp>
+      <p:sp>
+        <p:nvSpPr>
+          <p:cNvPr id="4" name="TextBox 3">
+            <a:extLst>
+              <a:ext uri="{FF2B5EF4-FFF2-40B4-BE49-F238E27FC236}">
+                <a16:creationId xmlns:a16="http://schemas.microsoft.com/office/drawing/2014/main" id="{18FA1107-B0DD-445B-EB4B-A1EF37F4EB91}"/>
+              </a:ext>
+            </a:extLst>
+          </p:cNvPr>
+          <p:cNvSpPr txBox="1"/>
+          <p:nvPr/>
+        </p:nvSpPr>
+        <p:spPr>
+          <a:xfrm>
+            <a:off x="730293" y="3479630"/>
+            <a:ext cx="8665320" cy="923330"/>
+          </a:xfrm>
+          <a:prstGeom prst="rect">
+            <a:avLst/>
+          </a:prstGeom>
+          <a:noFill/>
+        </p:spPr>
+        <p:txBody>
+          <a:bodyPr wrap="square" rtlCol="0">
+            <a:spAutoFit/>
+          </a:bodyPr>
+          <a:lstStyle/>
+          <a:p>
+            <a:r>
+              <a:rPr lang="en-GB" dirty="0"/>
+              <a:t>Weapons fire along the forward vector, zombies need to be “faced” so we use the FACE steering Behaviour.</a:t>
+            </a:r>
+          </a:p>
+          <a:p>
+            <a:r>
+              <a:rPr lang="en-GB" dirty="0"/>
+              <a:t>Evade/Flee will also be useful for close range kiting.</a:t>
+            </a:r>
+            <a:endParaRPr lang="LID4096" dirty="0"/>
+          </a:p>
+        </p:txBody>
+      </p:sp>
+      <p:sp>
+        <p:nvSpPr>
+          <p:cNvPr id="6" name="TextBox 5">
+            <a:extLst>
+              <a:ext uri="{FF2B5EF4-FFF2-40B4-BE49-F238E27FC236}">
+                <a16:creationId xmlns:a16="http://schemas.microsoft.com/office/drawing/2014/main" id="{D7564C4A-320B-31A3-68E5-3844BD49CF61}"/>
+              </a:ext>
+            </a:extLst>
+          </p:cNvPr>
+          <p:cNvSpPr txBox="1"/>
+          <p:nvPr/>
+        </p:nvSpPr>
+        <p:spPr>
+          <a:xfrm>
+            <a:off x="1219712" y="4828296"/>
+            <a:ext cx="6097022" cy="646331"/>
+          </a:xfrm>
+          <a:prstGeom prst="rect">
+            <a:avLst/>
+          </a:prstGeom>
+          <a:noFill/>
+        </p:spPr>
+        <p:txBody>
+          <a:bodyPr wrap="square">
+            <a:spAutoFit/>
+          </a:bodyPr>
+          <a:lstStyle/>
+          <a:p>
+            <a:r>
+              <a:rPr lang="en-GB" dirty="0"/>
+              <a:t>FSM is the perfect fit for Aim and Fire + back off when cornered + re-aim when zombie moves combat logic!</a:t>
+            </a:r>
+            <a:endParaRPr lang="LID4096" dirty="0"/>
+          </a:p>
+        </p:txBody>
+      </p:sp>
+      <p:sp>
+        <p:nvSpPr>
+          <p:cNvPr id="8" name="TextBox 7">
+            <a:extLst>
+              <a:ext uri="{FF2B5EF4-FFF2-40B4-BE49-F238E27FC236}">
+                <a16:creationId xmlns:a16="http://schemas.microsoft.com/office/drawing/2014/main" id="{17EE9F25-7D4F-5BED-CF2E-916834DA9E2F}"/>
+              </a:ext>
+            </a:extLst>
+          </p:cNvPr>
+          <p:cNvSpPr txBox="1"/>
+          <p:nvPr/>
+        </p:nvSpPr>
+        <p:spPr>
+          <a:xfrm>
+            <a:off x="5736480" y="21139"/>
+            <a:ext cx="6097022" cy="1754326"/>
+          </a:xfrm>
+          <a:prstGeom prst="rect">
+            <a:avLst/>
+          </a:prstGeom>
+          <a:noFill/>
+        </p:spPr>
+        <p:txBody>
+          <a:bodyPr wrap="square">
+            <a:spAutoFit/>
+          </a:bodyPr>
+          <a:lstStyle/>
+          <a:p>
+            <a:r>
+              <a:rPr lang="LID4096" dirty="0"/>
+              <a:t>FSM Instance is Built and Started in the Task Enter.</a:t>
+            </a:r>
+          </a:p>
+          <a:p>
+            <a:r>
+              <a:rPr lang="LID4096" dirty="0"/>
+              <a:t>FSM Instance is Ticked in Task Tick.</a:t>
+            </a:r>
+          </a:p>
+          <a:p>
+            <a:r>
+              <a:rPr lang="LID4096" dirty="0"/>
+              <a:t>FSM Instance is stopped in Task Abort and Task End.</a:t>
+            </a:r>
+          </a:p>
+          <a:p>
+            <a:r>
+              <a:rPr lang="LID4096" dirty="0"/>
+              <a:t>-------------------------------------</a:t>
+            </a:r>
+          </a:p>
+          <a:p>
+            <a:r>
+              <a:rPr lang="LID4096" dirty="0"/>
+              <a:t>Combat States are assigned Transitions which constantly check the distance between Survivor and Threat. </a:t>
+            </a:r>
           </a:p>
         </p:txBody>
       </p:sp>
@@ -5304,18 +5461,12 @@
 </file>
 
 <file path=customXml/item1.xml><?xml version="1.0" encoding="utf-8"?>
-<p:properties xmlns:p="http://schemas.microsoft.com/office/2006/metadata/properties" xmlns:xsi="http://www.w3.org/2001/XMLSchema-instance" xmlns:pc="http://schemas.microsoft.com/office/infopath/2007/PartnerControls">
-  <documentManagement>
-    <IconOverlay xmlns="http://schemas.microsoft.com/sharepoint/v4" xsi:nil="true"/>
-    <TaxCatchAll xmlns="128482ec-0431-40d5-ab26-89ea2a4f3ccd" xsi:nil="true"/>
-    <m99485b88215436a82099f8287cba0b0 xmlns="128482ec-0431-40d5-ab26-89ea2a4f3ccd">
-      <Terms xmlns="http://schemas.microsoft.com/office/infopath/2007/PartnerControls"/>
-    </m99485b88215436a82099f8287cba0b0>
-    <lcf76f155ced4ddcb4097134ff3c332f xmlns="60eb0cf4-ae2a-4762-800a-cb593b869ecb">
-      <Terms xmlns="http://schemas.microsoft.com/office/infopath/2007/PartnerControls"/>
-    </lcf76f155ced4ddcb4097134ff3c332f>
-  </documentManagement>
-</p:properties>
+<?mso-contentType ?>
+<FormTemplates xmlns="http://schemas.microsoft.com/sharepoint/v3/contenttype/forms">
+  <Display>DocumentLibraryForm</Display>
+  <Edit>DocumentLibraryForm</Edit>
+  <New>DocumentLibraryForm</New>
+</FormTemplates>
 </file>
 
 <file path=customXml/item2.xml><?xml version="1.0" encoding="utf-8"?>
@@ -5592,22 +5743,24 @@
 </file>
 
 <file path=customXml/item3.xml><?xml version="1.0" encoding="utf-8"?>
-<?mso-contentType ?>
-<FormTemplates xmlns="http://schemas.microsoft.com/sharepoint/v3/contenttype/forms">
-  <Display>DocumentLibraryForm</Display>
-  <Edit>DocumentLibraryForm</Edit>
-  <New>DocumentLibraryForm</New>
-</FormTemplates>
+<p:properties xmlns:p="http://schemas.microsoft.com/office/2006/metadata/properties" xmlns:xsi="http://www.w3.org/2001/XMLSchema-instance" xmlns:pc="http://schemas.microsoft.com/office/infopath/2007/PartnerControls">
+  <documentManagement>
+    <IconOverlay xmlns="http://schemas.microsoft.com/sharepoint/v4" xsi:nil="true"/>
+    <TaxCatchAll xmlns="128482ec-0431-40d5-ab26-89ea2a4f3ccd" xsi:nil="true"/>
+    <m99485b88215436a82099f8287cba0b0 xmlns="128482ec-0431-40d5-ab26-89ea2a4f3ccd">
+      <Terms xmlns="http://schemas.microsoft.com/office/infopath/2007/PartnerControls"/>
+    </m99485b88215436a82099f8287cba0b0>
+    <lcf76f155ced4ddcb4097134ff3c332f xmlns="60eb0cf4-ae2a-4762-800a-cb593b869ecb">
+      <Terms xmlns="http://schemas.microsoft.com/office/infopath/2007/PartnerControls"/>
+    </lcf76f155ced4ddcb4097134ff3c332f>
+  </documentManagement>
+</p:properties>
 </file>
 
 <file path=customXml/itemProps1.xml><?xml version="1.0" encoding="utf-8"?>
-<ds:datastoreItem xmlns:ds="http://schemas.openxmlformats.org/officeDocument/2006/customXml" ds:itemID="{B743389A-7EE0-4951-8919-E91DD69E3687}">
+<ds:datastoreItem xmlns:ds="http://schemas.openxmlformats.org/officeDocument/2006/customXml" ds:itemID="{AF8EC6D1-CB19-4400-AD0A-0C75CD884AEA}">
   <ds:schemaRefs>
-    <ds:schemaRef ds:uri="128482ec-0431-40d5-ab26-89ea2a4f3ccd"/>
-    <ds:schemaRef ds:uri="http://schemas.microsoft.com/office/2006/metadata/properties"/>
-    <ds:schemaRef ds:uri="http://schemas.microsoft.com/office/infopath/2007/PartnerControls"/>
-    <ds:schemaRef ds:uri="http://schemas.microsoft.com/sharepoint/v4"/>
-    <ds:schemaRef ds:uri="60eb0cf4-ae2a-4762-800a-cb593b869ecb"/>
+    <ds:schemaRef ds:uri="http://schemas.microsoft.com/sharepoint/v3/contenttype/forms"/>
   </ds:schemaRefs>
 </ds:datastoreItem>
 </file>
@@ -5634,9 +5787,13 @@
 </file>
 
 <file path=customXml/itemProps3.xml><?xml version="1.0" encoding="utf-8"?>
-<ds:datastoreItem xmlns:ds="http://schemas.openxmlformats.org/officeDocument/2006/customXml" ds:itemID="{AF8EC6D1-CB19-4400-AD0A-0C75CD884AEA}">
+<ds:datastoreItem xmlns:ds="http://schemas.openxmlformats.org/officeDocument/2006/customXml" ds:itemID="{B743389A-7EE0-4951-8919-E91DD69E3687}">
   <ds:schemaRefs>
-    <ds:schemaRef ds:uri="http://schemas.microsoft.com/sharepoint/v3/contenttype/forms"/>
+    <ds:schemaRef ds:uri="128482ec-0431-40d5-ab26-89ea2a4f3ccd"/>
+    <ds:schemaRef ds:uri="http://schemas.microsoft.com/office/2006/metadata/properties"/>
+    <ds:schemaRef ds:uri="http://schemas.microsoft.com/office/infopath/2007/PartnerControls"/>
+    <ds:schemaRef ds:uri="http://schemas.microsoft.com/sharepoint/v4"/>
+    <ds:schemaRef ds:uri="60eb0cf4-ae2a-4762-800a-cb593b869ecb"/>
   </ds:schemaRefs>
 </ds:datastoreItem>
 </file>
--- a/GPP_ZombieAI_AdamovDaniel_2DAE10.pptx
+++ b/GPP_ZombieAI_AdamovDaniel_2DAE10.pptx
@@ -405,7 +405,7 @@
           <a:p>
             <a:fld id="{82085877-2B37-48E7-8B6D-4D4ED486130A}" type="datetimeFigureOut">
               <a:rPr lang="en-BE" smtClean="0"/>
-              <a:t>06/01/2026</a:t>
+              <a:t>06/02/2026</a:t>
             </a:fld>
             <a:endParaRPr lang="en-BE"/>
           </a:p>
@@ -605,7 +605,7 @@
           <a:p>
             <a:fld id="{82085877-2B37-48E7-8B6D-4D4ED486130A}" type="datetimeFigureOut">
               <a:rPr lang="en-BE" smtClean="0"/>
-              <a:t>06/01/2026</a:t>
+              <a:t>06/02/2026</a:t>
             </a:fld>
             <a:endParaRPr lang="en-BE"/>
           </a:p>
@@ -815,7 +815,7 @@
           <a:p>
             <a:fld id="{82085877-2B37-48E7-8B6D-4D4ED486130A}" type="datetimeFigureOut">
               <a:rPr lang="en-BE" smtClean="0"/>
-              <a:t>06/01/2026</a:t>
+              <a:t>06/02/2026</a:t>
             </a:fld>
             <a:endParaRPr lang="en-BE"/>
           </a:p>
@@ -1015,7 +1015,7 @@
           <a:p>
             <a:fld id="{82085877-2B37-48E7-8B6D-4D4ED486130A}" type="datetimeFigureOut">
               <a:rPr lang="en-BE" smtClean="0"/>
-              <a:t>06/01/2026</a:t>
+              <a:t>06/02/2026</a:t>
             </a:fld>
             <a:endParaRPr lang="en-BE"/>
           </a:p>
@@ -1291,7 +1291,7 @@
           <a:p>
             <a:fld id="{82085877-2B37-48E7-8B6D-4D4ED486130A}" type="datetimeFigureOut">
               <a:rPr lang="en-BE" smtClean="0"/>
-              <a:t>06/01/2026</a:t>
+              <a:t>06/02/2026</a:t>
             </a:fld>
             <a:endParaRPr lang="en-BE"/>
           </a:p>
@@ -1559,7 +1559,7 @@
           <a:p>
             <a:fld id="{82085877-2B37-48E7-8B6D-4D4ED486130A}" type="datetimeFigureOut">
               <a:rPr lang="en-BE" smtClean="0"/>
-              <a:t>06/01/2026</a:t>
+              <a:t>06/02/2026</a:t>
             </a:fld>
             <a:endParaRPr lang="en-BE"/>
           </a:p>
@@ -1974,7 +1974,7 @@
           <a:p>
             <a:fld id="{82085877-2B37-48E7-8B6D-4D4ED486130A}" type="datetimeFigureOut">
               <a:rPr lang="en-BE" smtClean="0"/>
-              <a:t>06/01/2026</a:t>
+              <a:t>06/02/2026</a:t>
             </a:fld>
             <a:endParaRPr lang="en-BE"/>
           </a:p>
@@ -2116,7 +2116,7 @@
           <a:p>
             <a:fld id="{82085877-2B37-48E7-8B6D-4D4ED486130A}" type="datetimeFigureOut">
               <a:rPr lang="en-BE" smtClean="0"/>
-              <a:t>06/01/2026</a:t>
+              <a:t>06/02/2026</a:t>
             </a:fld>
             <a:endParaRPr lang="en-BE"/>
           </a:p>
@@ -2229,7 +2229,7 @@
           <a:p>
             <a:fld id="{82085877-2B37-48E7-8B6D-4D4ED486130A}" type="datetimeFigureOut">
               <a:rPr lang="en-BE" smtClean="0"/>
-              <a:t>06/01/2026</a:t>
+              <a:t>06/02/2026</a:t>
             </a:fld>
             <a:endParaRPr lang="en-BE"/>
           </a:p>
@@ -2542,7 +2542,7 @@
           <a:p>
             <a:fld id="{82085877-2B37-48E7-8B6D-4D4ED486130A}" type="datetimeFigureOut">
               <a:rPr lang="en-BE" smtClean="0"/>
-              <a:t>06/01/2026</a:t>
+              <a:t>06/02/2026</a:t>
             </a:fld>
             <a:endParaRPr lang="en-BE"/>
           </a:p>
@@ -2831,7 +2831,7 @@
           <a:p>
             <a:fld id="{82085877-2B37-48E7-8B6D-4D4ED486130A}" type="datetimeFigureOut">
               <a:rPr lang="en-BE" smtClean="0"/>
-              <a:t>06/01/2026</a:t>
+              <a:t>06/02/2026</a:t>
             </a:fld>
             <a:endParaRPr lang="en-BE"/>
           </a:p>
@@ -3074,7 +3074,7 @@
           <a:p>
             <a:fld id="{82085877-2B37-48E7-8B6D-4D4ED486130A}" type="datetimeFigureOut">
               <a:rPr lang="en-BE" smtClean="0"/>
-              <a:t>06/01/2026</a:t>
+              <a:t>06/02/2026</a:t>
             </a:fld>
             <a:endParaRPr lang="en-BE"/>
           </a:p>
@@ -4511,6 +4511,45 @@
           </a:p>
         </p:txBody>
       </p:sp>
+      <p:sp>
+        <p:nvSpPr>
+          <p:cNvPr id="6" name="TextBox 5">
+            <a:extLst>
+              <a:ext uri="{FF2B5EF4-FFF2-40B4-BE49-F238E27FC236}">
+                <a16:creationId xmlns:a16="http://schemas.microsoft.com/office/drawing/2014/main" id="{E4AF3CD0-8532-CDD3-3437-B03ABB00E8A3}"/>
+              </a:ext>
+            </a:extLst>
+          </p:cNvPr>
+          <p:cNvSpPr txBox="1"/>
+          <p:nvPr/>
+        </p:nvSpPr>
+        <p:spPr>
+          <a:xfrm>
+            <a:off x="127343" y="4184551"/>
+            <a:ext cx="6222828" cy="2308324"/>
+          </a:xfrm>
+          <a:prstGeom prst="rect">
+            <a:avLst/>
+          </a:prstGeom>
+          <a:noFill/>
+        </p:spPr>
+        <p:txBody>
+          <a:bodyPr wrap="square">
+            <a:spAutoFit/>
+          </a:bodyPr>
+          <a:lstStyle/>
+          <a:p>
+            <a:r>
+              <a:rPr lang="" b="0" i="0" dirty="0">
+                <a:effectLst/>
+                <a:latin typeface="SFMono-Regular"/>
+              </a:rPr>
+              <a:t>Making use of the BT Task class - Use Item of Type, we set the HIGHEST priority node in the whole BT to be Emergency Heal, the condition being HealthPct &lt;= 0.3. Next is Combat which we already did. But after that comes Eat when Tired which is again if StaminaPct &lt;= 0.3 -&gt; Use Item of Type: Food. The final new addition is the Task Drop Empty Weapon which comes before Loot and internally returns Success if: - has weapon of Pistol or/and Shotgun - weapon's Item value &lt;= 0</a:t>
+            </a:r>
+            <a:endParaRPr lang="LID4096" dirty="0"/>
+          </a:p>
+        </p:txBody>
+      </p:sp>
     </p:spTree>
     <p:extLst>
       <p:ext uri="{BB962C8B-B14F-4D97-AF65-F5344CB8AC3E}">
@@ -5461,12 +5500,18 @@
 </file>
 
 <file path=customXml/item1.xml><?xml version="1.0" encoding="utf-8"?>
-<?mso-contentType ?>
-<FormTemplates xmlns="http://schemas.microsoft.com/sharepoint/v3/contenttype/forms">
-  <Display>DocumentLibraryForm</Display>
-  <Edit>DocumentLibraryForm</Edit>
-  <New>DocumentLibraryForm</New>
-</FormTemplates>
+<p:properties xmlns:p="http://schemas.microsoft.com/office/2006/metadata/properties" xmlns:xsi="http://www.w3.org/2001/XMLSchema-instance" xmlns:pc="http://schemas.microsoft.com/office/infopath/2007/PartnerControls">
+  <documentManagement>
+    <IconOverlay xmlns="http://schemas.microsoft.com/sharepoint/v4" xsi:nil="true"/>
+    <TaxCatchAll xmlns="128482ec-0431-40d5-ab26-89ea2a4f3ccd" xsi:nil="true"/>
+    <m99485b88215436a82099f8287cba0b0 xmlns="128482ec-0431-40d5-ab26-89ea2a4f3ccd">
+      <Terms xmlns="http://schemas.microsoft.com/office/infopath/2007/PartnerControls"/>
+    </m99485b88215436a82099f8287cba0b0>
+    <lcf76f155ced4ddcb4097134ff3c332f xmlns="60eb0cf4-ae2a-4762-800a-cb593b869ecb">
+      <Terms xmlns="http://schemas.microsoft.com/office/infopath/2007/PartnerControls"/>
+    </lcf76f155ced4ddcb4097134ff3c332f>
+  </documentManagement>
+</p:properties>
 </file>
 
 <file path=customXml/item2.xml><?xml version="1.0" encoding="utf-8"?>
@@ -5743,24 +5788,22 @@
 </file>
 
 <file path=customXml/item3.xml><?xml version="1.0" encoding="utf-8"?>
-<p:properties xmlns:p="http://schemas.microsoft.com/office/2006/metadata/properties" xmlns:xsi="http://www.w3.org/2001/XMLSchema-instance" xmlns:pc="http://schemas.microsoft.com/office/infopath/2007/PartnerControls">
-  <documentManagement>
-    <IconOverlay xmlns="http://schemas.microsoft.com/sharepoint/v4" xsi:nil="true"/>
-    <TaxCatchAll xmlns="128482ec-0431-40d5-ab26-89ea2a4f3ccd" xsi:nil="true"/>
-    <m99485b88215436a82099f8287cba0b0 xmlns="128482ec-0431-40d5-ab26-89ea2a4f3ccd">
-      <Terms xmlns="http://schemas.microsoft.com/office/infopath/2007/PartnerControls"/>
-    </m99485b88215436a82099f8287cba0b0>
-    <lcf76f155ced4ddcb4097134ff3c332f xmlns="60eb0cf4-ae2a-4762-800a-cb593b869ecb">
-      <Terms xmlns="http://schemas.microsoft.com/office/infopath/2007/PartnerControls"/>
-    </lcf76f155ced4ddcb4097134ff3c332f>
-  </documentManagement>
-</p:properties>
+<?mso-contentType ?>
+<FormTemplates xmlns="http://schemas.microsoft.com/sharepoint/v3/contenttype/forms">
+  <Display>DocumentLibraryForm</Display>
+  <Edit>DocumentLibraryForm</Edit>
+  <New>DocumentLibraryForm</New>
+</FormTemplates>
 </file>
 
 <file path=customXml/itemProps1.xml><?xml version="1.0" encoding="utf-8"?>
-<ds:datastoreItem xmlns:ds="http://schemas.openxmlformats.org/officeDocument/2006/customXml" ds:itemID="{AF8EC6D1-CB19-4400-AD0A-0C75CD884AEA}">
+<ds:datastoreItem xmlns:ds="http://schemas.openxmlformats.org/officeDocument/2006/customXml" ds:itemID="{B743389A-7EE0-4951-8919-E91DD69E3687}">
   <ds:schemaRefs>
-    <ds:schemaRef ds:uri="http://schemas.microsoft.com/sharepoint/v3/contenttype/forms"/>
+    <ds:schemaRef ds:uri="128482ec-0431-40d5-ab26-89ea2a4f3ccd"/>
+    <ds:schemaRef ds:uri="http://schemas.microsoft.com/office/2006/metadata/properties"/>
+    <ds:schemaRef ds:uri="http://schemas.microsoft.com/office/infopath/2007/PartnerControls"/>
+    <ds:schemaRef ds:uri="http://schemas.microsoft.com/sharepoint/v4"/>
+    <ds:schemaRef ds:uri="60eb0cf4-ae2a-4762-800a-cb593b869ecb"/>
   </ds:schemaRefs>
 </ds:datastoreItem>
 </file>
@@ -5787,13 +5830,9 @@
 </file>
 
 <file path=customXml/itemProps3.xml><?xml version="1.0" encoding="utf-8"?>
-<ds:datastoreItem xmlns:ds="http://schemas.openxmlformats.org/officeDocument/2006/customXml" ds:itemID="{B743389A-7EE0-4951-8919-E91DD69E3687}">
+<ds:datastoreItem xmlns:ds="http://schemas.openxmlformats.org/officeDocument/2006/customXml" ds:itemID="{AF8EC6D1-CB19-4400-AD0A-0C75CD884AEA}">
   <ds:schemaRefs>
-    <ds:schemaRef ds:uri="128482ec-0431-40d5-ab26-89ea2a4f3ccd"/>
-    <ds:schemaRef ds:uri="http://schemas.microsoft.com/office/2006/metadata/properties"/>
-    <ds:schemaRef ds:uri="http://schemas.microsoft.com/office/infopath/2007/PartnerControls"/>
-    <ds:schemaRef ds:uri="http://schemas.microsoft.com/sharepoint/v4"/>
-    <ds:schemaRef ds:uri="60eb0cf4-ae2a-4762-800a-cb593b869ecb"/>
+    <ds:schemaRef ds:uri="http://schemas.microsoft.com/sharepoint/v3/contenttype/forms"/>
   </ds:schemaRefs>
 </ds:datastoreItem>
 </file>
--- a/GPP_ZombieAI_AdamovDaniel_2DAE10.pptx
+++ b/GPP_ZombieAI_AdamovDaniel_2DAE10.pptx
@@ -3686,6 +3686,338 @@
           </a:p>
         </p:txBody>
       </p:sp>
+      <p:sp>
+        <p:nvSpPr>
+          <p:cNvPr id="7" name="TextBox 6">
+            <a:extLst>
+              <a:ext uri="{FF2B5EF4-FFF2-40B4-BE49-F238E27FC236}">
+                <a16:creationId xmlns:a16="http://schemas.microsoft.com/office/drawing/2014/main" id="{79A5084E-9CF4-3942-9685-4BF7B41998B1}"/>
+              </a:ext>
+            </a:extLst>
+          </p:cNvPr>
+          <p:cNvSpPr txBox="1"/>
+          <p:nvPr/>
+        </p:nvSpPr>
+        <p:spPr>
+          <a:xfrm>
+            <a:off x="6258118" y="2780021"/>
+            <a:ext cx="6097022" cy="2862322"/>
+          </a:xfrm>
+          <a:prstGeom prst="rect">
+            <a:avLst/>
+          </a:prstGeom>
+          <a:noFill/>
+        </p:spPr>
+        <p:txBody>
+          <a:bodyPr wrap="square">
+            <a:spAutoFit/>
+          </a:bodyPr>
+          <a:lstStyle/>
+          <a:p>
+            <a:pPr>
+              <a:buNone/>
+            </a:pPr>
+            <a:r>
+              <a:rPr lang="en-GB" dirty="0">
+                <a:latin typeface="JetBrains Mono"/>
+              </a:rPr>
+              <a:t>Memory c</a:t>
+            </a:r>
+            <a:r>
+              <a:rPr lang="en-GB" sz="1800" dirty="0">
+                <a:effectLst/>
+                <a:latin typeface="JetBrains Mono"/>
+              </a:rPr>
+              <a:t>ompared to Zombies:</a:t>
+            </a:r>
+          </a:p>
+          <a:p>
+            <a:pPr>
+              <a:buNone/>
+            </a:pPr>
+            <a:r>
+              <a:rPr lang="en-GB" sz="1800" dirty="0" err="1">
+                <a:effectLst/>
+                <a:latin typeface="JetBrains Mono"/>
+              </a:rPr>
+              <a:t>Items.RemoveAll</a:t>
+            </a:r>
+            <a:r>
+              <a:rPr lang="en-GB" sz="1800" dirty="0">
+                <a:effectLst/>
+                <a:latin typeface="JetBrains Mono"/>
+              </a:rPr>
+              <a:t>( [](</a:t>
+            </a:r>
+            <a:r>
+              <a:rPr lang="en-GB" sz="1800" dirty="0" err="1">
+                <a:effectLst/>
+                <a:latin typeface="JetBrains Mono"/>
+              </a:rPr>
+              <a:t>const</a:t>
+            </a:r>
+            <a:r>
+              <a:rPr lang="en-GB" sz="1800" dirty="0">
+                <a:effectLst/>
+                <a:latin typeface="JetBrains Mono"/>
+              </a:rPr>
+              <a:t> </a:t>
+            </a:r>
+            <a:r>
+              <a:rPr lang="en-GB" sz="1800" dirty="0" err="1">
+                <a:effectLst/>
+                <a:latin typeface="JetBrains Mono"/>
+              </a:rPr>
+              <a:t>FPerceivedItem</a:t>
+            </a:r>
+            <a:r>
+              <a:rPr lang="en-GB" sz="1800" dirty="0">
+                <a:effectLst/>
+                <a:latin typeface="JetBrains Mono"/>
+              </a:rPr>
+              <a:t>&amp; R)</a:t>
+            </a:r>
+            <a:br>
+              <a:rPr lang="en-GB" sz="1800" dirty="0">
+                <a:effectLst/>
+                <a:latin typeface="JetBrains Mono"/>
+              </a:rPr>
+            </a:br>
+            <a:r>
+              <a:rPr lang="en-GB" sz="1800" dirty="0">
+                <a:effectLst/>
+                <a:latin typeface="JetBrains Mono"/>
+              </a:rPr>
+              <a:t>{</a:t>
+            </a:r>
+            <a:br>
+              <a:rPr lang="en-GB" sz="1800" dirty="0">
+                <a:effectLst/>
+                <a:latin typeface="JetBrains Mono"/>
+              </a:rPr>
+            </a:br>
+            <a:r>
+              <a:rPr lang="en-GB" sz="1800" dirty="0">
+                <a:effectLst/>
+                <a:latin typeface="JetBrains Mono"/>
+              </a:rPr>
+              <a:t>    return !</a:t>
+            </a:r>
+            <a:r>
+              <a:rPr lang="en-GB" sz="1800" dirty="0" err="1">
+                <a:effectLst/>
+                <a:latin typeface="JetBrains Mono"/>
+              </a:rPr>
+              <a:t>R.Actor.IsValid</a:t>
+            </a:r>
+            <a:r>
+              <a:rPr lang="en-GB" sz="1800" dirty="0">
+                <a:effectLst/>
+                <a:latin typeface="JetBrains Mono"/>
+              </a:rPr>
+              <a:t>() || </a:t>
+            </a:r>
+            <a:r>
+              <a:rPr lang="en-GB" sz="1800" dirty="0" err="1">
+                <a:effectLst/>
+                <a:latin typeface="JetBrains Mono"/>
+              </a:rPr>
+              <a:t>R.Actor</a:t>
+            </a:r>
+            <a:r>
+              <a:rPr lang="en-GB" sz="1800" dirty="0">
+                <a:effectLst/>
+                <a:latin typeface="JetBrains Mono"/>
+              </a:rPr>
+              <a:t>-&gt;</a:t>
+            </a:r>
+            <a:r>
+              <a:rPr lang="en-GB" sz="1800" dirty="0" err="1">
+                <a:effectLst/>
+                <a:latin typeface="JetBrains Mono"/>
+              </a:rPr>
+              <a:t>IsHidden</a:t>
+            </a:r>
+            <a:r>
+              <a:rPr lang="en-GB" sz="1800" dirty="0">
+                <a:effectLst/>
+                <a:latin typeface="JetBrains Mono"/>
+              </a:rPr>
+              <a:t>();</a:t>
+            </a:r>
+            <a:br>
+              <a:rPr lang="en-GB" sz="1800" dirty="0">
+                <a:effectLst/>
+                <a:latin typeface="JetBrains Mono"/>
+              </a:rPr>
+            </a:br>
+            <a:r>
+              <a:rPr lang="en-GB" sz="1800" dirty="0">
+                <a:effectLst/>
+                <a:latin typeface="JetBrains Mono"/>
+              </a:rPr>
+              <a:t>});</a:t>
+            </a:r>
+            <a:br>
+              <a:rPr lang="en-GB" sz="1800" dirty="0">
+                <a:effectLst/>
+                <a:latin typeface="JetBrains Mono"/>
+              </a:rPr>
+            </a:br>
+            <a:r>
+              <a:rPr lang="en-GB" sz="1800" dirty="0" err="1">
+                <a:effectLst/>
+                <a:latin typeface="JetBrains Mono"/>
+              </a:rPr>
+              <a:t>Zombies.RemoveAll</a:t>
+            </a:r>
+            <a:r>
+              <a:rPr lang="en-GB" sz="1800" dirty="0">
+                <a:effectLst/>
+                <a:latin typeface="JetBrains Mono"/>
+              </a:rPr>
+              <a:t>([&amp;](</a:t>
+            </a:r>
+            <a:r>
+              <a:rPr lang="en-GB" sz="1800" dirty="0" err="1">
+                <a:effectLst/>
+                <a:latin typeface="JetBrains Mono"/>
+              </a:rPr>
+              <a:t>const</a:t>
+            </a:r>
+            <a:r>
+              <a:rPr lang="en-GB" sz="1800" dirty="0">
+                <a:effectLst/>
+                <a:latin typeface="JetBrains Mono"/>
+              </a:rPr>
+              <a:t> </a:t>
+            </a:r>
+            <a:r>
+              <a:rPr lang="en-GB" sz="1800" dirty="0" err="1">
+                <a:effectLst/>
+                <a:latin typeface="JetBrains Mono"/>
+              </a:rPr>
+              <a:t>FPerceivedActor</a:t>
+            </a:r>
+            <a:r>
+              <a:rPr lang="en-GB" sz="1800" dirty="0">
+                <a:effectLst/>
+                <a:latin typeface="JetBrains Mono"/>
+              </a:rPr>
+              <a:t>&amp; R)</a:t>
+            </a:r>
+            <a:br>
+              <a:rPr lang="en-GB" sz="1800" dirty="0">
+                <a:effectLst/>
+                <a:latin typeface="JetBrains Mono"/>
+              </a:rPr>
+            </a:br>
+            <a:r>
+              <a:rPr lang="en-GB" sz="1800" dirty="0">
+                <a:effectLst/>
+                <a:latin typeface="JetBrains Mono"/>
+              </a:rPr>
+              <a:t>{</a:t>
+            </a:r>
+            <a:br>
+              <a:rPr lang="en-GB" sz="1800" dirty="0">
+                <a:effectLst/>
+                <a:latin typeface="JetBrains Mono"/>
+              </a:rPr>
+            </a:br>
+            <a:r>
+              <a:rPr lang="en-GB" sz="1800" dirty="0">
+                <a:effectLst/>
+                <a:latin typeface="JetBrains Mono"/>
+              </a:rPr>
+              <a:t>    return !</a:t>
+            </a:r>
+            <a:r>
+              <a:rPr lang="en-GB" sz="1800" dirty="0" err="1">
+                <a:effectLst/>
+                <a:latin typeface="JetBrains Mono"/>
+              </a:rPr>
+              <a:t>R.Actor.IsValid</a:t>
+            </a:r>
+            <a:r>
+              <a:rPr lang="en-GB" sz="1800" dirty="0">
+                <a:effectLst/>
+                <a:latin typeface="JetBrains Mono"/>
+              </a:rPr>
+              <a:t>() || (!</a:t>
+            </a:r>
+            <a:r>
+              <a:rPr lang="en-GB" sz="1800" dirty="0" err="1">
+                <a:effectLst/>
+                <a:latin typeface="JetBrains Mono"/>
+              </a:rPr>
+              <a:t>R.bIsVisible</a:t>
+            </a:r>
+            <a:r>
+              <a:rPr lang="en-GB" sz="1800" dirty="0">
+                <a:effectLst/>
+                <a:latin typeface="JetBrains Mono"/>
+              </a:rPr>
+              <a:t> &amp;&amp; (</a:t>
+            </a:r>
+            <a:r>
+              <a:rPr lang="en-GB" sz="1800" dirty="0" err="1">
+                <a:effectLst/>
+                <a:latin typeface="JetBrains Mono"/>
+              </a:rPr>
+              <a:t>TimeNow</a:t>
+            </a:r>
+            <a:r>
+              <a:rPr lang="en-GB" sz="1800" dirty="0">
+                <a:effectLst/>
+                <a:latin typeface="JetBrains Mono"/>
+              </a:rPr>
+              <a:t> - </a:t>
+            </a:r>
+            <a:r>
+              <a:rPr lang="en-GB" sz="1800" dirty="0" err="1">
+                <a:effectLst/>
+                <a:latin typeface="JetBrains Mono"/>
+              </a:rPr>
+              <a:t>R.LastSeenTime</a:t>
+            </a:r>
+            <a:r>
+              <a:rPr lang="en-GB" sz="1800" dirty="0">
+                <a:effectLst/>
+                <a:latin typeface="JetBrains Mono"/>
+              </a:rPr>
+              <a:t>) &gt; </a:t>
+            </a:r>
+            <a:r>
+              <a:rPr lang="en-GB" sz="1800" dirty="0" err="1">
+                <a:effectLst/>
+                <a:latin typeface="JetBrains Mono"/>
+              </a:rPr>
+              <a:t>ThreatMemoryDuration</a:t>
+            </a:r>
+            <a:r>
+              <a:rPr lang="en-GB" sz="1800" dirty="0">
+                <a:effectLst/>
+                <a:latin typeface="JetBrains Mono"/>
+              </a:rPr>
+              <a:t>);</a:t>
+            </a:r>
+            <a:br>
+              <a:rPr lang="en-GB" sz="1800" dirty="0">
+                <a:effectLst/>
+                <a:latin typeface="JetBrains Mono"/>
+              </a:rPr>
+            </a:br>
+            <a:r>
+              <a:rPr lang="en-GB" sz="1800" dirty="0">
+                <a:effectLst/>
+                <a:latin typeface="JetBrains Mono"/>
+              </a:rPr>
+              <a:t>});</a:t>
+            </a:r>
+          </a:p>
+        </p:txBody>
+      </p:sp>
     </p:spTree>
     <p:extLst>
       <p:ext uri="{BB962C8B-B14F-4D97-AF65-F5344CB8AC3E}">
@@ -4176,338 +4508,6 @@
               <a:rPr lang="en-GB" sz="1800" i="1" dirty="0"/>
             </a:br>
             <a:endParaRPr lang="LID4096" dirty="0"/>
-          </a:p>
-        </p:txBody>
-      </p:sp>
-      <p:sp>
-        <p:nvSpPr>
-          <p:cNvPr id="7" name="TextBox 6">
-            <a:extLst>
-              <a:ext uri="{FF2B5EF4-FFF2-40B4-BE49-F238E27FC236}">
-                <a16:creationId xmlns:a16="http://schemas.microsoft.com/office/drawing/2014/main" id="{79A5084E-9CF4-3942-9685-4BF7B41998B1}"/>
-              </a:ext>
-            </a:extLst>
-          </p:cNvPr>
-          <p:cNvSpPr txBox="1"/>
-          <p:nvPr/>
-        </p:nvSpPr>
-        <p:spPr>
-          <a:xfrm>
-            <a:off x="6350171" y="3209605"/>
-            <a:ext cx="6097022" cy="2862322"/>
-          </a:xfrm>
-          <a:prstGeom prst="rect">
-            <a:avLst/>
-          </a:prstGeom>
-          <a:noFill/>
-        </p:spPr>
-        <p:txBody>
-          <a:bodyPr wrap="square">
-            <a:spAutoFit/>
-          </a:bodyPr>
-          <a:lstStyle/>
-          <a:p>
-            <a:pPr>
-              <a:buNone/>
-            </a:pPr>
-            <a:r>
-              <a:rPr lang="en-GB" dirty="0">
-                <a:latin typeface="JetBrains Mono"/>
-              </a:rPr>
-              <a:t>Memory c</a:t>
-            </a:r>
-            <a:r>
-              <a:rPr lang="en-GB" sz="1800" dirty="0">
-                <a:effectLst/>
-                <a:latin typeface="JetBrains Mono"/>
-              </a:rPr>
-              <a:t>ompared to Zombies:</a:t>
-            </a:r>
-          </a:p>
-          <a:p>
-            <a:pPr>
-              <a:buNone/>
-            </a:pPr>
-            <a:r>
-              <a:rPr lang="en-GB" sz="1800" dirty="0" err="1">
-                <a:effectLst/>
-                <a:latin typeface="JetBrains Mono"/>
-              </a:rPr>
-              <a:t>Items.RemoveAll</a:t>
-            </a:r>
-            <a:r>
-              <a:rPr lang="en-GB" sz="1800" dirty="0">
-                <a:effectLst/>
-                <a:latin typeface="JetBrains Mono"/>
-              </a:rPr>
-              <a:t>( [](</a:t>
-            </a:r>
-            <a:r>
-              <a:rPr lang="en-GB" sz="1800" dirty="0" err="1">
-                <a:effectLst/>
-                <a:latin typeface="JetBrains Mono"/>
-              </a:rPr>
-              <a:t>const</a:t>
-            </a:r>
-            <a:r>
-              <a:rPr lang="en-GB" sz="1800" dirty="0">
-                <a:effectLst/>
-                <a:latin typeface="JetBrains Mono"/>
-              </a:rPr>
-              <a:t> </a:t>
-            </a:r>
-            <a:r>
-              <a:rPr lang="en-GB" sz="1800" dirty="0" err="1">
-                <a:effectLst/>
-                <a:latin typeface="JetBrains Mono"/>
-              </a:rPr>
-              <a:t>FPerceivedItem</a:t>
-            </a:r>
-            <a:r>
-              <a:rPr lang="en-GB" sz="1800" dirty="0">
-                <a:effectLst/>
-                <a:latin typeface="JetBrains Mono"/>
-              </a:rPr>
-              <a:t>&amp; R)</a:t>
-            </a:r>
-            <a:br>
-              <a:rPr lang="en-GB" sz="1800" dirty="0">
-                <a:effectLst/>
-                <a:latin typeface="JetBrains Mono"/>
-              </a:rPr>
-            </a:br>
-            <a:r>
-              <a:rPr lang="en-GB" sz="1800" dirty="0">
-                <a:effectLst/>
-                <a:latin typeface="JetBrains Mono"/>
-              </a:rPr>
-              <a:t>{</a:t>
-            </a:r>
-            <a:br>
-              <a:rPr lang="en-GB" sz="1800" dirty="0">
-                <a:effectLst/>
-                <a:latin typeface="JetBrains Mono"/>
-              </a:rPr>
-            </a:br>
-            <a:r>
-              <a:rPr lang="en-GB" sz="1800" dirty="0">
-                <a:effectLst/>
-                <a:latin typeface="JetBrains Mono"/>
-              </a:rPr>
-              <a:t>    return !</a:t>
-            </a:r>
-            <a:r>
-              <a:rPr lang="en-GB" sz="1800" dirty="0" err="1">
-                <a:effectLst/>
-                <a:latin typeface="JetBrains Mono"/>
-              </a:rPr>
-              <a:t>R.Actor.IsValid</a:t>
-            </a:r>
-            <a:r>
-              <a:rPr lang="en-GB" sz="1800" dirty="0">
-                <a:effectLst/>
-                <a:latin typeface="JetBrains Mono"/>
-              </a:rPr>
-              <a:t>() || </a:t>
-            </a:r>
-            <a:r>
-              <a:rPr lang="en-GB" sz="1800" dirty="0" err="1">
-                <a:effectLst/>
-                <a:latin typeface="JetBrains Mono"/>
-              </a:rPr>
-              <a:t>R.Actor</a:t>
-            </a:r>
-            <a:r>
-              <a:rPr lang="en-GB" sz="1800" dirty="0">
-                <a:effectLst/>
-                <a:latin typeface="JetBrains Mono"/>
-              </a:rPr>
-              <a:t>-&gt;</a:t>
-            </a:r>
-            <a:r>
-              <a:rPr lang="en-GB" sz="1800" dirty="0" err="1">
-                <a:effectLst/>
-                <a:latin typeface="JetBrains Mono"/>
-              </a:rPr>
-              <a:t>IsHidden</a:t>
-            </a:r>
-            <a:r>
-              <a:rPr lang="en-GB" sz="1800" dirty="0">
-                <a:effectLst/>
-                <a:latin typeface="JetBrains Mono"/>
-              </a:rPr>
-              <a:t>();</a:t>
-            </a:r>
-            <a:br>
-              <a:rPr lang="en-GB" sz="1800" dirty="0">
-                <a:effectLst/>
-                <a:latin typeface="JetBrains Mono"/>
-              </a:rPr>
-            </a:br>
-            <a:r>
-              <a:rPr lang="en-GB" sz="1800" dirty="0">
-                <a:effectLst/>
-                <a:latin typeface="JetBrains Mono"/>
-              </a:rPr>
-              <a:t>});</a:t>
-            </a:r>
-            <a:br>
-              <a:rPr lang="en-GB" sz="1800" dirty="0">
-                <a:effectLst/>
-                <a:latin typeface="JetBrains Mono"/>
-              </a:rPr>
-            </a:br>
-            <a:r>
-              <a:rPr lang="en-GB" sz="1800" dirty="0" err="1">
-                <a:effectLst/>
-                <a:latin typeface="JetBrains Mono"/>
-              </a:rPr>
-              <a:t>Zombies.RemoveAll</a:t>
-            </a:r>
-            <a:r>
-              <a:rPr lang="en-GB" sz="1800" dirty="0">
-                <a:effectLst/>
-                <a:latin typeface="JetBrains Mono"/>
-              </a:rPr>
-              <a:t>([&amp;](</a:t>
-            </a:r>
-            <a:r>
-              <a:rPr lang="en-GB" sz="1800" dirty="0" err="1">
-                <a:effectLst/>
-                <a:latin typeface="JetBrains Mono"/>
-              </a:rPr>
-              <a:t>const</a:t>
-            </a:r>
-            <a:r>
-              <a:rPr lang="en-GB" sz="1800" dirty="0">
-                <a:effectLst/>
-                <a:latin typeface="JetBrains Mono"/>
-              </a:rPr>
-              <a:t> </a:t>
-            </a:r>
-            <a:r>
-              <a:rPr lang="en-GB" sz="1800" dirty="0" err="1">
-                <a:effectLst/>
-                <a:latin typeface="JetBrains Mono"/>
-              </a:rPr>
-              <a:t>FPerceivedActor</a:t>
-            </a:r>
-            <a:r>
-              <a:rPr lang="en-GB" sz="1800" dirty="0">
-                <a:effectLst/>
-                <a:latin typeface="JetBrains Mono"/>
-              </a:rPr>
-              <a:t>&amp; R)</a:t>
-            </a:r>
-            <a:br>
-              <a:rPr lang="en-GB" sz="1800" dirty="0">
-                <a:effectLst/>
-                <a:latin typeface="JetBrains Mono"/>
-              </a:rPr>
-            </a:br>
-            <a:r>
-              <a:rPr lang="en-GB" sz="1800" dirty="0">
-                <a:effectLst/>
-                <a:latin typeface="JetBrains Mono"/>
-              </a:rPr>
-              <a:t>{</a:t>
-            </a:r>
-            <a:br>
-              <a:rPr lang="en-GB" sz="1800" dirty="0">
-                <a:effectLst/>
-                <a:latin typeface="JetBrains Mono"/>
-              </a:rPr>
-            </a:br>
-            <a:r>
-              <a:rPr lang="en-GB" sz="1800" dirty="0">
-                <a:effectLst/>
-                <a:latin typeface="JetBrains Mono"/>
-              </a:rPr>
-              <a:t>    return !</a:t>
-            </a:r>
-            <a:r>
-              <a:rPr lang="en-GB" sz="1800" dirty="0" err="1">
-                <a:effectLst/>
-                <a:latin typeface="JetBrains Mono"/>
-              </a:rPr>
-              <a:t>R.Actor.IsValid</a:t>
-            </a:r>
-            <a:r>
-              <a:rPr lang="en-GB" sz="1800" dirty="0">
-                <a:effectLst/>
-                <a:latin typeface="JetBrains Mono"/>
-              </a:rPr>
-              <a:t>() || (!</a:t>
-            </a:r>
-            <a:r>
-              <a:rPr lang="en-GB" sz="1800" dirty="0" err="1">
-                <a:effectLst/>
-                <a:latin typeface="JetBrains Mono"/>
-              </a:rPr>
-              <a:t>R.bIsVisible</a:t>
-            </a:r>
-            <a:r>
-              <a:rPr lang="en-GB" sz="1800" dirty="0">
-                <a:effectLst/>
-                <a:latin typeface="JetBrains Mono"/>
-              </a:rPr>
-              <a:t> &amp;&amp; (</a:t>
-            </a:r>
-            <a:r>
-              <a:rPr lang="en-GB" sz="1800" dirty="0" err="1">
-                <a:effectLst/>
-                <a:latin typeface="JetBrains Mono"/>
-              </a:rPr>
-              <a:t>TimeNow</a:t>
-            </a:r>
-            <a:r>
-              <a:rPr lang="en-GB" sz="1800" dirty="0">
-                <a:effectLst/>
-                <a:latin typeface="JetBrains Mono"/>
-              </a:rPr>
-              <a:t> - </a:t>
-            </a:r>
-            <a:r>
-              <a:rPr lang="en-GB" sz="1800" dirty="0" err="1">
-                <a:effectLst/>
-                <a:latin typeface="JetBrains Mono"/>
-              </a:rPr>
-              <a:t>R.LastSeenTime</a:t>
-            </a:r>
-            <a:r>
-              <a:rPr lang="en-GB" sz="1800" dirty="0">
-                <a:effectLst/>
-                <a:latin typeface="JetBrains Mono"/>
-              </a:rPr>
-              <a:t>) &gt; </a:t>
-            </a:r>
-            <a:r>
-              <a:rPr lang="en-GB" sz="1800" dirty="0" err="1">
-                <a:effectLst/>
-                <a:latin typeface="JetBrains Mono"/>
-              </a:rPr>
-              <a:t>ThreatMemoryDuration</a:t>
-            </a:r>
-            <a:r>
-              <a:rPr lang="en-GB" sz="1800" dirty="0">
-                <a:effectLst/>
-                <a:latin typeface="JetBrains Mono"/>
-              </a:rPr>
-              <a:t>);</a:t>
-            </a:r>
-            <a:br>
-              <a:rPr lang="en-GB" sz="1800" dirty="0">
-                <a:effectLst/>
-                <a:latin typeface="JetBrains Mono"/>
-              </a:rPr>
-            </a:br>
-            <a:r>
-              <a:rPr lang="en-GB" sz="1800" dirty="0">
-                <a:effectLst/>
-                <a:latin typeface="JetBrains Mono"/>
-              </a:rPr>
-              <a:t>});</a:t>
-            </a:r>
           </a:p>
         </p:txBody>
       </p:sp>

--- a/GPP_ZombieAI_AdamovDaniel_2DAE10.pptx
+++ b/GPP_ZombieAI_AdamovDaniel_2DAE10.pptx
@@ -3625,10 +3625,10 @@
           <a:lstStyle/>
           <a:p>
             <a:r>
-              <a:rPr lang="en-US"/>
+              <a:rPr lang="en-US" dirty="0"/>
               <a:t>Decision Making</a:t>
             </a:r>
-            <a:endParaRPr lang="en-BE"/>
+            <a:endParaRPr lang="en-BE" dirty="0"/>
           </a:p>
         </p:txBody>
       </p:sp>
@@ -4015,6 +4015,116 @@
               </a:rPr>
               <a:t>});</a:t>
             </a:r>
+          </a:p>
+        </p:txBody>
+      </p:sp>
+      <p:sp>
+        <p:nvSpPr>
+          <p:cNvPr id="5" name="TextBox 4">
+            <a:extLst>
+              <a:ext uri="{FF2B5EF4-FFF2-40B4-BE49-F238E27FC236}">
+                <a16:creationId xmlns:a16="http://schemas.microsoft.com/office/drawing/2014/main" id="{1F5FF6DB-97B2-25A0-EC65-E01180646B8A}"/>
+              </a:ext>
+            </a:extLst>
+          </p:cNvPr>
+          <p:cNvSpPr txBox="1"/>
+          <p:nvPr/>
+        </p:nvSpPr>
+        <p:spPr>
+          <a:xfrm>
+            <a:off x="81316" y="2989118"/>
+            <a:ext cx="6176802" cy="2585323"/>
+          </a:xfrm>
+          <a:prstGeom prst="rect">
+            <a:avLst/>
+          </a:prstGeom>
+          <a:noFill/>
+        </p:spPr>
+        <p:txBody>
+          <a:bodyPr wrap="square">
+            <a:spAutoFit/>
+          </a:bodyPr>
+          <a:lstStyle/>
+          <a:p>
+            <a:pPr>
+              <a:buNone/>
+            </a:pPr>
+            <a:r>
+              <a:rPr lang="en-GB" dirty="0">
+                <a:latin typeface="JetBrains Mono"/>
+              </a:rPr>
+              <a:t>Combat vs Flee:</a:t>
+            </a:r>
+            <a:br>
+              <a:rPr lang="en-GB" dirty="0">
+                <a:latin typeface="JetBrains Mono"/>
+              </a:rPr>
+            </a:br>
+            <a:r>
+              <a:rPr lang="en-GB" dirty="0">
+                <a:latin typeface="JetBrains Mono"/>
+              </a:rPr>
+              <a:t>By storing new Threat connected data such as speed and near count, a Should Flee flag is set which is checked once Combat or Flee tasks are entered.</a:t>
+            </a:r>
+          </a:p>
+          <a:p>
+            <a:pPr>
+              <a:buNone/>
+            </a:pPr>
+            <a:r>
+              <a:rPr lang="en-GB" dirty="0">
+                <a:latin typeface="JetBrains Mono"/>
+              </a:rPr>
+              <a:t>The should flee conditions are:</a:t>
+            </a:r>
+          </a:p>
+          <a:p>
+            <a:pPr>
+              <a:buNone/>
+            </a:pPr>
+            <a:r>
+              <a:rPr lang="en-GB" dirty="0">
+                <a:latin typeface="JetBrains Mono"/>
+              </a:rPr>
+              <a:t>1. No weapon / no ammo on weapon</a:t>
+            </a:r>
+          </a:p>
+          <a:p>
+            <a:pPr>
+              <a:buNone/>
+            </a:pPr>
+            <a:r>
+              <a:rPr lang="en-GB" dirty="0">
+                <a:latin typeface="JetBrains Mono"/>
+              </a:rPr>
+              <a:t>2. Health too low</a:t>
+            </a:r>
+          </a:p>
+          <a:p>
+            <a:pPr>
+              <a:buNone/>
+            </a:pPr>
+            <a:r>
+              <a:rPr lang="en-GB" dirty="0">
+                <a:latin typeface="JetBrains Mono"/>
+              </a:rPr>
+              <a:t>3. Too many Threats nearby</a:t>
+            </a:r>
+          </a:p>
+          <a:p>
+            <a:pPr>
+              <a:buNone/>
+            </a:pPr>
+            <a:r>
+              <a:rPr lang="en-GB" dirty="0">
+                <a:latin typeface="JetBrains Mono"/>
+              </a:rPr>
+              <a:t>4. Heavy zombie as Threat Actor - not worth fighting</a:t>
+            </a:r>
+            <a:endParaRPr lang="en-GB" sz="1800" dirty="0">
+              <a:effectLst/>
+              <a:latin typeface="JetBrains Mono"/>
+            </a:endParaRPr>
           </a:p>
         </p:txBody>
       </p:sp>

--- a/GPP_ZombieAI_AdamovDaniel_2DAE10.pptx
+++ b/GPP_ZombieAI_AdamovDaniel_2DAE10.pptx
@@ -4317,7 +4317,7 @@
         </p:nvSpPr>
         <p:spPr>
           <a:xfrm>
-            <a:off x="1219712" y="4828296"/>
+            <a:off x="5256778" y="2665504"/>
             <a:ext cx="6097022" cy="646331"/>
           </a:xfrm>
           <a:prstGeom prst="rect">
@@ -4394,6 +4394,71 @@
             <a:r>
               <a:rPr lang="LID4096" dirty="0"/>
               <a:t>Combat States are assigned Transitions which constantly check the distance between Survivor and Threat. </a:t>
+            </a:r>
+          </a:p>
+        </p:txBody>
+      </p:sp>
+      <p:sp>
+        <p:nvSpPr>
+          <p:cNvPr id="5" name="TextBox 4">
+            <a:extLst>
+              <a:ext uri="{FF2B5EF4-FFF2-40B4-BE49-F238E27FC236}">
+                <a16:creationId xmlns:a16="http://schemas.microsoft.com/office/drawing/2014/main" id="{02D2D738-227C-D386-FA63-98BE1429A5C7}"/>
+              </a:ext>
+            </a:extLst>
+          </p:cNvPr>
+          <p:cNvSpPr txBox="1"/>
+          <p:nvPr/>
+        </p:nvSpPr>
+        <p:spPr>
+          <a:xfrm>
+            <a:off x="4122703" y="4738549"/>
+            <a:ext cx="6348597" cy="1754326"/>
+          </a:xfrm>
+          <a:prstGeom prst="rect">
+            <a:avLst/>
+          </a:prstGeom>
+          <a:noFill/>
+        </p:spPr>
+        <p:txBody>
+          <a:bodyPr wrap="none" rtlCol="0">
+            <a:spAutoFit/>
+          </a:bodyPr>
+          <a:lstStyle/>
+          <a:p>
+            <a:r>
+              <a:rPr lang="en-GB" dirty="0"/>
+              <a:t>Fleeing is interesting – at first, I thought reusing Evade</a:t>
+            </a:r>
+          </a:p>
+          <a:p>
+            <a:r>
+              <a:rPr lang="en-GB" dirty="0"/>
+              <a:t>would be perfect for this situation but then I came to the </a:t>
+            </a:r>
+          </a:p>
+          <a:p>
+            <a:r>
+              <a:rPr lang="en-GB" dirty="0"/>
+              <a:t>idea that Evade does not care about walls or generation.</a:t>
+            </a:r>
+          </a:p>
+          <a:p>
+            <a:r>
+              <a:rPr lang="en-GB" dirty="0"/>
+              <a:t>That’s why I decided to make a dedicated Find Flee Location </a:t>
+            </a:r>
+          </a:p>
+          <a:p>
+            <a:r>
+              <a:rPr lang="en-GB" dirty="0"/>
+              <a:t>task which calculates the “Best” position to move to when fleeing</a:t>
+            </a:r>
+          </a:p>
+          <a:p>
+            <a:r>
+              <a:rPr lang="en-GB" dirty="0"/>
+              <a:t>while taking into account walls and best direction.</a:t>
             </a:r>
           </a:p>
         </p:txBody>

--- a/GPP_ZombieAI_AdamovDaniel_2DAE10.pptx
+++ b/GPP_ZombieAI_AdamovDaniel_2DAE10.pptx
@@ -405,7 +405,7 @@
           <a:p>
             <a:fld id="{82085877-2B37-48E7-8B6D-4D4ED486130A}" type="datetimeFigureOut">
               <a:rPr lang="en-BE" smtClean="0"/>
-              <a:t>06/02/2026</a:t>
+              <a:t>06/05/2026</a:t>
             </a:fld>
             <a:endParaRPr lang="en-BE"/>
           </a:p>
@@ -605,7 +605,7 @@
           <a:p>
             <a:fld id="{82085877-2B37-48E7-8B6D-4D4ED486130A}" type="datetimeFigureOut">
               <a:rPr lang="en-BE" smtClean="0"/>
-              <a:t>06/02/2026</a:t>
+              <a:t>06/05/2026</a:t>
             </a:fld>
             <a:endParaRPr lang="en-BE"/>
           </a:p>
@@ -815,7 +815,7 @@
           <a:p>
             <a:fld id="{82085877-2B37-48E7-8B6D-4D4ED486130A}" type="datetimeFigureOut">
               <a:rPr lang="en-BE" smtClean="0"/>
-              <a:t>06/02/2026</a:t>
+              <a:t>06/05/2026</a:t>
             </a:fld>
             <a:endParaRPr lang="en-BE"/>
           </a:p>
@@ -1015,7 +1015,7 @@
           <a:p>
             <a:fld id="{82085877-2B37-48E7-8B6D-4D4ED486130A}" type="datetimeFigureOut">
               <a:rPr lang="en-BE" smtClean="0"/>
-              <a:t>06/02/2026</a:t>
+              <a:t>06/05/2026</a:t>
             </a:fld>
             <a:endParaRPr lang="en-BE"/>
           </a:p>
@@ -1291,7 +1291,7 @@
           <a:p>
             <a:fld id="{82085877-2B37-48E7-8B6D-4D4ED486130A}" type="datetimeFigureOut">
               <a:rPr lang="en-BE" smtClean="0"/>
-              <a:t>06/02/2026</a:t>
+              <a:t>06/05/2026</a:t>
             </a:fld>
             <a:endParaRPr lang="en-BE"/>
           </a:p>
@@ -1559,7 +1559,7 @@
           <a:p>
             <a:fld id="{82085877-2B37-48E7-8B6D-4D4ED486130A}" type="datetimeFigureOut">
               <a:rPr lang="en-BE" smtClean="0"/>
-              <a:t>06/02/2026</a:t>
+              <a:t>06/05/2026</a:t>
             </a:fld>
             <a:endParaRPr lang="en-BE"/>
           </a:p>
@@ -1974,7 +1974,7 @@
           <a:p>
             <a:fld id="{82085877-2B37-48E7-8B6D-4D4ED486130A}" type="datetimeFigureOut">
               <a:rPr lang="en-BE" smtClean="0"/>
-              <a:t>06/02/2026</a:t>
+              <a:t>06/05/2026</a:t>
             </a:fld>
             <a:endParaRPr lang="en-BE"/>
           </a:p>
@@ -2116,7 +2116,7 @@
           <a:p>
             <a:fld id="{82085877-2B37-48E7-8B6D-4D4ED486130A}" type="datetimeFigureOut">
               <a:rPr lang="en-BE" smtClean="0"/>
-              <a:t>06/02/2026</a:t>
+              <a:t>06/05/2026</a:t>
             </a:fld>
             <a:endParaRPr lang="en-BE"/>
           </a:p>
@@ -2229,7 +2229,7 @@
           <a:p>
             <a:fld id="{82085877-2B37-48E7-8B6D-4D4ED486130A}" type="datetimeFigureOut">
               <a:rPr lang="en-BE" smtClean="0"/>
-              <a:t>06/02/2026</a:t>
+              <a:t>06/05/2026</a:t>
             </a:fld>
             <a:endParaRPr lang="en-BE"/>
           </a:p>
@@ -2542,7 +2542,7 @@
           <a:p>
             <a:fld id="{82085877-2B37-48E7-8B6D-4D4ED486130A}" type="datetimeFigureOut">
               <a:rPr lang="en-BE" smtClean="0"/>
-              <a:t>06/02/2026</a:t>
+              <a:t>06/05/2026</a:t>
             </a:fld>
             <a:endParaRPr lang="en-BE"/>
           </a:p>
@@ -2831,7 +2831,7 @@
           <a:p>
             <a:fld id="{82085877-2B37-48E7-8B6D-4D4ED486130A}" type="datetimeFigureOut">
               <a:rPr lang="en-BE" smtClean="0"/>
-              <a:t>06/02/2026</a:t>
+              <a:t>06/05/2026</a:t>
             </a:fld>
             <a:endParaRPr lang="en-BE"/>
           </a:p>
@@ -3074,7 +3074,7 @@
           <a:p>
             <a:fld id="{82085877-2B37-48E7-8B6D-4D4ED486130A}" type="datetimeFigureOut">
               <a:rPr lang="en-BE" smtClean="0"/>
-              <a:t>06/02/2026</a:t>
+              <a:t>06/05/2026</a:t>
             </a:fld>
             <a:endParaRPr lang="en-BE"/>
           </a:p>
@@ -4275,7 +4275,7 @@
         </p:nvSpPr>
         <p:spPr>
           <a:xfrm>
-            <a:off x="730293" y="3479630"/>
+            <a:off x="294572" y="3185782"/>
             <a:ext cx="8665320" cy="923330"/>
           </a:xfrm>
           <a:prstGeom prst="rect">
@@ -4317,7 +4317,7 @@
         </p:nvSpPr>
         <p:spPr>
           <a:xfrm>
-            <a:off x="5256778" y="2665504"/>
+            <a:off x="5864834" y="2192071"/>
             <a:ext cx="6097022" cy="646331"/>
           </a:xfrm>
           <a:prstGeom prst="rect">
@@ -4412,7 +4412,7 @@
         </p:nvSpPr>
         <p:spPr>
           <a:xfrm>
-            <a:off x="4122703" y="4738549"/>
+            <a:off x="6211309" y="3647447"/>
             <a:ext cx="6348597" cy="1754326"/>
           </a:xfrm>
           <a:prstGeom prst="rect">
@@ -4460,6 +4460,181 @@
               <a:rPr lang="en-GB" dirty="0"/>
               <a:t>while taking into account walls and best direction.</a:t>
             </a:r>
+          </a:p>
+        </p:txBody>
+      </p:sp>
+      <p:sp>
+        <p:nvSpPr>
+          <p:cNvPr id="7" name="TextBox 6">
+            <a:extLst>
+              <a:ext uri="{FF2B5EF4-FFF2-40B4-BE49-F238E27FC236}">
+                <a16:creationId xmlns:a16="http://schemas.microsoft.com/office/drawing/2014/main" id="{22BE9DE7-70A5-4C67-698F-CF84ED2D8581}"/>
+              </a:ext>
+            </a:extLst>
+          </p:cNvPr>
+          <p:cNvSpPr txBox="1"/>
+          <p:nvPr/>
+        </p:nvSpPr>
+        <p:spPr>
+          <a:xfrm>
+            <a:off x="0" y="4033684"/>
+            <a:ext cx="7417415" cy="2585323"/>
+          </a:xfrm>
+          <a:prstGeom prst="rect">
+            <a:avLst/>
+          </a:prstGeom>
+          <a:noFill/>
+        </p:spPr>
+        <p:txBody>
+          <a:bodyPr wrap="none" rtlCol="0">
+            <a:spAutoFit/>
+          </a:bodyPr>
+          <a:lstStyle/>
+          <a:p>
+            <a:r>
+              <a:rPr lang="en-GB" dirty="0"/>
+              <a:t>Interesting decision:</a:t>
+            </a:r>
+          </a:p>
+          <a:p>
+            <a:r>
+              <a:rPr lang="" dirty="0"/>
+              <a:t>FSMInstance-&gt;AddTransition( Engage, Reposition, </a:t>
+            </a:r>
+            <a:br>
+              <a:rPr lang="" dirty="0"/>
+            </a:br>
+            <a:r>
+              <a:rPr lang="" dirty="0"/>
+              <a:t>    [DistanceToThreat, MinDist, ThreatSpeed, MySpeed]()</a:t>
+            </a:r>
+            <a:br>
+              <a:rPr lang="" dirty="0"/>
+            </a:br>
+            <a:r>
+              <a:rPr lang="" dirty="0"/>
+              <a:t>    {</a:t>
+            </a:r>
+            <a:br>
+              <a:rPr lang="" dirty="0"/>
+            </a:br>
+            <a:r>
+              <a:rPr lang="" dirty="0"/>
+              <a:t>       const bool bTooClose{ DistanceToThreat() &lt; MinDist };</a:t>
+            </a:r>
+            <a:br>
+              <a:rPr lang="" dirty="0"/>
+            </a:br>
+            <a:r>
+              <a:rPr lang="" dirty="0"/>
+              <a:t>       const bool bCanOutrun{ ThreatSpeed &gt; 0.f &amp;&amp; ThreatSpeed &lt; MySpeed };</a:t>
+            </a:r>
+            <a:br>
+              <a:rPr lang="" dirty="0"/>
+            </a:br>
+            <a:r>
+              <a:rPr lang="" dirty="0"/>
+              <a:t>       return bTooClose &amp;&amp; bCanOutrun;</a:t>
+            </a:r>
+            <a:br>
+              <a:rPr lang="" dirty="0"/>
+            </a:br>
+            <a:r>
+              <a:rPr lang="" dirty="0"/>
+              <a:t>    } );</a:t>
+            </a:r>
+          </a:p>
+          <a:p>
+            <a:endParaRPr lang="LID4096" dirty="0"/>
+          </a:p>
+        </p:txBody>
+      </p:sp>
+      <p:sp>
+        <p:nvSpPr>
+          <p:cNvPr id="10" name="TextBox 9">
+            <a:extLst>
+              <a:ext uri="{FF2B5EF4-FFF2-40B4-BE49-F238E27FC236}">
+                <a16:creationId xmlns:a16="http://schemas.microsoft.com/office/drawing/2014/main" id="{50D20100-5887-E769-4B84-1FCE3FDDB544}"/>
+              </a:ext>
+            </a:extLst>
+          </p:cNvPr>
+          <p:cNvSpPr txBox="1"/>
+          <p:nvPr/>
+        </p:nvSpPr>
+        <p:spPr>
+          <a:xfrm>
+            <a:off x="5866888" y="5633714"/>
+            <a:ext cx="6186008" cy="1218149"/>
+          </a:xfrm>
+          <a:prstGeom prst="rect">
+            <a:avLst/>
+          </a:prstGeom>
+          <a:noFill/>
+        </p:spPr>
+        <p:txBody>
+          <a:bodyPr wrap="square">
+            <a:spAutoFit/>
+          </a:bodyPr>
+          <a:lstStyle/>
+          <a:p>
+            <a:pPr>
+              <a:buNone/>
+            </a:pPr>
+            <a:r>
+              <a:rPr lang="" sz="1800" i="1" dirty="0">
+                <a:solidFill>
+                  <a:srgbClr val="85C46C"/>
+                </a:solidFill>
+                <a:effectLst/>
+                <a:latin typeface="JetBrains Mono"/>
+              </a:rPr>
+              <a:t>// Engage -&gt; Reposition, see if distance is too low.</a:t>
+            </a:r>
+            <a:br>
+              <a:rPr lang="" sz="1800" i="1" dirty="0">
+                <a:solidFill>
+                  <a:srgbClr val="85C46C"/>
+                </a:solidFill>
+                <a:effectLst/>
+                <a:latin typeface="JetBrains Mono"/>
+              </a:rPr>
+            </a:br>
+            <a:r>
+              <a:rPr lang="" sz="1800" i="1" dirty="0">
+                <a:solidFill>
+                  <a:srgbClr val="85C46C"/>
+                </a:solidFill>
+                <a:effectLst/>
+                <a:latin typeface="JetBrains Mono"/>
+              </a:rPr>
+              <a:t>// EXCEPTION: even if distance is low, when facing a Runner, don't transition to Reposition =&gt; stay Fight</a:t>
+            </a:r>
+            <a:br>
+              <a:rPr lang="" sz="1800" i="1" dirty="0">
+                <a:solidFill>
+                  <a:srgbClr val="85C46C"/>
+                </a:solidFill>
+                <a:effectLst/>
+                <a:latin typeface="JetBrains Mono"/>
+              </a:rPr>
+            </a:br>
+            <a:r>
+              <a:rPr lang="" sz="1800" i="1" dirty="0">
+                <a:solidFill>
+                  <a:srgbClr val="85C46C"/>
+                </a:solidFill>
+                <a:effectLst/>
+                <a:latin typeface="JetBrains Mono"/>
+              </a:rPr>
+              <a:t>// =&gt; If can't outrun even when fleeing -&gt; fight</a:t>
+            </a:r>
+            <a:endParaRPr lang="" sz="1800" dirty="0">
+              <a:solidFill>
+                <a:srgbClr val="D0D0D0"/>
+              </a:solidFill>
+              <a:effectLst/>
+              <a:latin typeface="JetBrains Mono"/>
+            </a:endParaRPr>
           </a:p>
         </p:txBody>
       </p:sp>

--- a/GPP_ZombieAI_AdamovDaniel_2DAE10.pptx
+++ b/GPP_ZombieAI_AdamovDaniel_2DAE10.pptx
@@ -4400,71 +4400,6 @@
       </p:sp>
       <p:sp>
         <p:nvSpPr>
-          <p:cNvPr id="5" name="TextBox 4">
-            <a:extLst>
-              <a:ext uri="{FF2B5EF4-FFF2-40B4-BE49-F238E27FC236}">
-                <a16:creationId xmlns:a16="http://schemas.microsoft.com/office/drawing/2014/main" id="{02D2D738-227C-D386-FA63-98BE1429A5C7}"/>
-              </a:ext>
-            </a:extLst>
-          </p:cNvPr>
-          <p:cNvSpPr txBox="1"/>
-          <p:nvPr/>
-        </p:nvSpPr>
-        <p:spPr>
-          <a:xfrm>
-            <a:off x="6211309" y="3647447"/>
-            <a:ext cx="6348597" cy="1754326"/>
-          </a:xfrm>
-          <a:prstGeom prst="rect">
-            <a:avLst/>
-          </a:prstGeom>
-          <a:noFill/>
-        </p:spPr>
-        <p:txBody>
-          <a:bodyPr wrap="none" rtlCol="0">
-            <a:spAutoFit/>
-          </a:bodyPr>
-          <a:lstStyle/>
-          <a:p>
-            <a:r>
-              <a:rPr lang="en-GB" dirty="0"/>
-              <a:t>Fleeing is interesting – at first, I thought reusing Evade</a:t>
-            </a:r>
-          </a:p>
-          <a:p>
-            <a:r>
-              <a:rPr lang="en-GB" dirty="0"/>
-              <a:t>would be perfect for this situation but then I came to the </a:t>
-            </a:r>
-          </a:p>
-          <a:p>
-            <a:r>
-              <a:rPr lang="en-GB" dirty="0"/>
-              <a:t>idea that Evade does not care about walls or generation.</a:t>
-            </a:r>
-          </a:p>
-          <a:p>
-            <a:r>
-              <a:rPr lang="en-GB" dirty="0"/>
-              <a:t>That’s why I decided to make a dedicated Find Flee Location </a:t>
-            </a:r>
-          </a:p>
-          <a:p>
-            <a:r>
-              <a:rPr lang="en-GB" dirty="0"/>
-              <a:t>task which calculates the “Best” position to move to when fleeing</a:t>
-            </a:r>
-          </a:p>
-          <a:p>
-            <a:r>
-              <a:rPr lang="en-GB" dirty="0"/>
-              <a:t>while taking into account walls and best direction.</a:t>
-            </a:r>
-          </a:p>
-        </p:txBody>
-      </p:sp>
-      <p:sp>
-        <p:nvSpPr>
           <p:cNvPr id="7" name="TextBox 6">
             <a:extLst>
               <a:ext uri="{FF2B5EF4-FFF2-40B4-BE49-F238E27FC236}">
@@ -4563,7 +4498,7 @@
         </p:nvSpPr>
         <p:spPr>
           <a:xfrm>
-            <a:off x="5866888" y="5633714"/>
+            <a:off x="6161460" y="3721060"/>
             <a:ext cx="6186008" cy="1218149"/>
           </a:xfrm>
           <a:prstGeom prst="rect">
@@ -5003,6 +4938,182 @@
               <a:buNone/>
             </a:pPr>
             <a:endParaRPr lang="en-BE" dirty="0"/>
+          </a:p>
+        </p:txBody>
+      </p:sp>
+      <p:sp>
+        <p:nvSpPr>
+          <p:cNvPr id="5" name="TextBox 4">
+            <a:extLst>
+              <a:ext uri="{FF2B5EF4-FFF2-40B4-BE49-F238E27FC236}">
+                <a16:creationId xmlns:a16="http://schemas.microsoft.com/office/drawing/2014/main" id="{DAD1A9A8-C488-4EA0-690E-4C04F4AE4B1C}"/>
+              </a:ext>
+            </a:extLst>
+          </p:cNvPr>
+          <p:cNvSpPr txBox="1"/>
+          <p:nvPr/>
+        </p:nvSpPr>
+        <p:spPr>
+          <a:xfrm>
+            <a:off x="207122" y="2974168"/>
+            <a:ext cx="6097022" cy="1477328"/>
+          </a:xfrm>
+          <a:prstGeom prst="rect">
+            <a:avLst/>
+          </a:prstGeom>
+          <a:noFill/>
+        </p:spPr>
+        <p:txBody>
+          <a:bodyPr wrap="square">
+            <a:spAutoFit/>
+          </a:bodyPr>
+          <a:lstStyle/>
+          <a:p>
+            <a:r>
+              <a:rPr lang="LID4096" dirty="0"/>
+              <a:t>Created a new high priority (second highest after emergency heal) sequence React To Damage.</a:t>
+            </a:r>
+          </a:p>
+          <a:p>
+            <a:r>
+              <a:rPr lang="LID4096" dirty="0"/>
+              <a:t>It executes a task node Scan For Threat that rotates the survivor up to max of 400 degress and the moment Threat Actor is found/set -&gt; Succeed task.</a:t>
+            </a:r>
+          </a:p>
+        </p:txBody>
+      </p:sp>
+      <p:sp>
+        <p:nvSpPr>
+          <p:cNvPr id="6" name="TextBox 5">
+            <a:extLst>
+              <a:ext uri="{FF2B5EF4-FFF2-40B4-BE49-F238E27FC236}">
+                <a16:creationId xmlns:a16="http://schemas.microsoft.com/office/drawing/2014/main" id="{27EEEDB3-A3A2-10EA-8BE6-76A1DA1E8B43}"/>
+              </a:ext>
+            </a:extLst>
+          </p:cNvPr>
+          <p:cNvSpPr txBox="1"/>
+          <p:nvPr/>
+        </p:nvSpPr>
+        <p:spPr>
+          <a:xfrm>
+            <a:off x="6514334" y="2595915"/>
+            <a:ext cx="4839466" cy="1200329"/>
+          </a:xfrm>
+          <a:prstGeom prst="rect">
+            <a:avLst/>
+          </a:prstGeom>
+          <a:noFill/>
+        </p:spPr>
+        <p:txBody>
+          <a:bodyPr wrap="none" rtlCol="0">
+            <a:spAutoFit/>
+          </a:bodyPr>
+          <a:lstStyle/>
+          <a:p>
+            <a:r>
+              <a:rPr lang="en-GB" dirty="0"/>
+              <a:t>The only place where Steering </a:t>
+            </a:r>
+            <a:r>
+              <a:rPr lang="en-GB" dirty="0" err="1"/>
+              <a:t>Behaviors</a:t>
+            </a:r>
+            <a:r>
+              <a:rPr lang="en-GB" dirty="0"/>
+              <a:t> are used</a:t>
+            </a:r>
+          </a:p>
+          <a:p>
+            <a:r>
+              <a:rPr lang="en-GB" dirty="0"/>
+              <a:t>are in the Combat FSM:</a:t>
+            </a:r>
+          </a:p>
+          <a:p>
+            <a:pPr marL="285750" indent="-285750">
+              <a:buFontTx/>
+              <a:buChar char="-"/>
+            </a:pPr>
+            <a:r>
+              <a:rPr lang="en-GB" dirty="0"/>
+              <a:t>Face for Engage State</a:t>
+            </a:r>
+          </a:p>
+          <a:p>
+            <a:pPr marL="285750" indent="-285750">
+              <a:buFontTx/>
+              <a:buChar char="-"/>
+            </a:pPr>
+            <a:r>
+              <a:rPr lang="en-GB" dirty="0"/>
+              <a:t>Flee for Reposition State</a:t>
+            </a:r>
+            <a:endParaRPr lang="LID4096" dirty="0"/>
+          </a:p>
+        </p:txBody>
+      </p:sp>
+      <p:sp>
+        <p:nvSpPr>
+          <p:cNvPr id="7" name="TextBox 6">
+            <a:extLst>
+              <a:ext uri="{FF2B5EF4-FFF2-40B4-BE49-F238E27FC236}">
+                <a16:creationId xmlns:a16="http://schemas.microsoft.com/office/drawing/2014/main" id="{02D2D738-227C-D386-FA63-98BE1429A5C7}"/>
+              </a:ext>
+            </a:extLst>
+          </p:cNvPr>
+          <p:cNvSpPr txBox="1"/>
+          <p:nvPr/>
+        </p:nvSpPr>
+        <p:spPr>
+          <a:xfrm>
+            <a:off x="5132505" y="4451496"/>
+            <a:ext cx="6348597" cy="1754326"/>
+          </a:xfrm>
+          <a:prstGeom prst="rect">
+            <a:avLst/>
+          </a:prstGeom>
+          <a:noFill/>
+        </p:spPr>
+        <p:txBody>
+          <a:bodyPr wrap="none" rtlCol="0">
+            <a:spAutoFit/>
+          </a:bodyPr>
+          <a:lstStyle/>
+          <a:p>
+            <a:r>
+              <a:rPr lang="en-GB" dirty="0"/>
+              <a:t>Fleeing is interesting – at first, I thought reusing Evade</a:t>
+            </a:r>
+          </a:p>
+          <a:p>
+            <a:r>
+              <a:rPr lang="en-GB" dirty="0"/>
+              <a:t>would be perfect for this situation but then I came to the </a:t>
+            </a:r>
+          </a:p>
+          <a:p>
+            <a:r>
+              <a:rPr lang="en-GB" dirty="0"/>
+              <a:t>idea that Evade does not care about walls or generation.</a:t>
+            </a:r>
+          </a:p>
+          <a:p>
+            <a:r>
+              <a:rPr lang="en-GB" dirty="0"/>
+              <a:t>That’s why I decided to make a dedicated Find Flee Location </a:t>
+            </a:r>
+          </a:p>
+          <a:p>
+            <a:r>
+              <a:rPr lang="en-GB" dirty="0"/>
+              <a:t>task which calculates the “Best” position to move to when fleeing</a:t>
+            </a:r>
+          </a:p>
+          <a:p>
+            <a:r>
+              <a:rPr lang="en-GB" dirty="0"/>
+              <a:t>while taking into account walls and best direction.</a:t>
+            </a:r>
           </a:p>
         </p:txBody>
       </p:sp>
@@ -5850,18 +5961,12 @@
 </file>
 
 <file path=customXml/item1.xml><?xml version="1.0" encoding="utf-8"?>
-<p:properties xmlns:p="http://schemas.microsoft.com/office/2006/metadata/properties" xmlns:xsi="http://www.w3.org/2001/XMLSchema-instance" xmlns:pc="http://schemas.microsoft.com/office/infopath/2007/PartnerControls">
-  <documentManagement>
-    <IconOverlay xmlns="http://schemas.microsoft.com/sharepoint/v4" xsi:nil="true"/>
-    <TaxCatchAll xmlns="128482ec-0431-40d5-ab26-89ea2a4f3ccd" xsi:nil="true"/>
-    <m99485b88215436a82099f8287cba0b0 xmlns="128482ec-0431-40d5-ab26-89ea2a4f3ccd">
-      <Terms xmlns="http://schemas.microsoft.com/office/infopath/2007/PartnerControls"/>
-    </m99485b88215436a82099f8287cba0b0>
-    <lcf76f155ced4ddcb4097134ff3c332f xmlns="60eb0cf4-ae2a-4762-800a-cb593b869ecb">
-      <Terms xmlns="http://schemas.microsoft.com/office/infopath/2007/PartnerControls"/>
-    </lcf76f155ced4ddcb4097134ff3c332f>
-  </documentManagement>
-</p:properties>
+<?mso-contentType ?>
+<FormTemplates xmlns="http://schemas.microsoft.com/sharepoint/v3/contenttype/forms">
+  <Display>DocumentLibraryForm</Display>
+  <Edit>DocumentLibraryForm</Edit>
+  <New>DocumentLibraryForm</New>
+</FormTemplates>
 </file>
 
 <file path=customXml/item2.xml><?xml version="1.0" encoding="utf-8"?>
@@ -6138,22 +6243,24 @@
 </file>
 
 <file path=customXml/item3.xml><?xml version="1.0" encoding="utf-8"?>
-<?mso-contentType ?>
-<FormTemplates xmlns="http://schemas.microsoft.com/sharepoint/v3/contenttype/forms">
-  <Display>DocumentLibraryForm</Display>
-  <Edit>DocumentLibraryForm</Edit>
-  <New>DocumentLibraryForm</New>
-</FormTemplates>
+<p:properties xmlns:p="http://schemas.microsoft.com/office/2006/metadata/properties" xmlns:xsi="http://www.w3.org/2001/XMLSchema-instance" xmlns:pc="http://schemas.microsoft.com/office/infopath/2007/PartnerControls">
+  <documentManagement>
+    <IconOverlay xmlns="http://schemas.microsoft.com/sharepoint/v4" xsi:nil="true"/>
+    <TaxCatchAll xmlns="128482ec-0431-40d5-ab26-89ea2a4f3ccd" xsi:nil="true"/>
+    <m99485b88215436a82099f8287cba0b0 xmlns="128482ec-0431-40d5-ab26-89ea2a4f3ccd">
+      <Terms xmlns="http://schemas.microsoft.com/office/infopath/2007/PartnerControls"/>
+    </m99485b88215436a82099f8287cba0b0>
+    <lcf76f155ced4ddcb4097134ff3c332f xmlns="60eb0cf4-ae2a-4762-800a-cb593b869ecb">
+      <Terms xmlns="http://schemas.microsoft.com/office/infopath/2007/PartnerControls"/>
+    </lcf76f155ced4ddcb4097134ff3c332f>
+  </documentManagement>
+</p:properties>
 </file>
 
 <file path=customXml/itemProps1.xml><?xml version="1.0" encoding="utf-8"?>
-<ds:datastoreItem xmlns:ds="http://schemas.openxmlformats.org/officeDocument/2006/customXml" ds:itemID="{B743389A-7EE0-4951-8919-E91DD69E3687}">
+<ds:datastoreItem xmlns:ds="http://schemas.openxmlformats.org/officeDocument/2006/customXml" ds:itemID="{AF8EC6D1-CB19-4400-AD0A-0C75CD884AEA}">
   <ds:schemaRefs>
-    <ds:schemaRef ds:uri="128482ec-0431-40d5-ab26-89ea2a4f3ccd"/>
-    <ds:schemaRef ds:uri="http://schemas.microsoft.com/office/2006/metadata/properties"/>
-    <ds:schemaRef ds:uri="http://schemas.microsoft.com/office/infopath/2007/PartnerControls"/>
-    <ds:schemaRef ds:uri="http://schemas.microsoft.com/sharepoint/v4"/>
-    <ds:schemaRef ds:uri="60eb0cf4-ae2a-4762-800a-cb593b869ecb"/>
+    <ds:schemaRef ds:uri="http://schemas.microsoft.com/sharepoint/v3/contenttype/forms"/>
   </ds:schemaRefs>
 </ds:datastoreItem>
 </file>
@@ -6180,9 +6287,13 @@
 </file>
 
 <file path=customXml/itemProps3.xml><?xml version="1.0" encoding="utf-8"?>
-<ds:datastoreItem xmlns:ds="http://schemas.openxmlformats.org/officeDocument/2006/customXml" ds:itemID="{AF8EC6D1-CB19-4400-AD0A-0C75CD884AEA}">
+<ds:datastoreItem xmlns:ds="http://schemas.openxmlformats.org/officeDocument/2006/customXml" ds:itemID="{B743389A-7EE0-4951-8919-E91DD69E3687}">
   <ds:schemaRefs>
-    <ds:schemaRef ds:uri="http://schemas.microsoft.com/sharepoint/v3/contenttype/forms"/>
+    <ds:schemaRef ds:uri="128482ec-0431-40d5-ab26-89ea2a4f3ccd"/>
+    <ds:schemaRef ds:uri="http://schemas.microsoft.com/office/2006/metadata/properties"/>
+    <ds:schemaRef ds:uri="http://schemas.microsoft.com/office/infopath/2007/PartnerControls"/>
+    <ds:schemaRef ds:uri="http://schemas.microsoft.com/sharepoint/v4"/>
+    <ds:schemaRef ds:uri="60eb0cf4-ae2a-4762-800a-cb593b869ecb"/>
   </ds:schemaRefs>
 </ds:datastoreItem>
 </file>